--- a/european_values/presentation/eu_ai_scenarios.pptx
+++ b/european_values/presentation/eu_ai_scenarios.pptx
@@ -22,6 +22,7 @@
     <p:sldId id="270" r:id="rId16"/>
     <p:sldId id="271" r:id="rId17"/>
     <p:sldId id="272" r:id="rId18"/>
+    <p:sldId id="273" r:id="rId19"/>
   </p:sldIdLst>
   <p:sldSz cx="9144000" cy="5143500" type="screen16x9"/>
   <p:notesSz cx="6858000" cy="9144000"/>
@@ -3812,6 +3813,88 @@
             </a:pPr>
             <a:r>
               <a:rPr/>
+              <a:t>What if Europe caught up on adoption?</a:t>
+            </a:r>
+          </a:p>
+        </p:txBody>
+      </p:sp>
+      <p:pic>
+        <p:nvPicPr>
+          <p:cNvPr descr="../output/figures/convergence.png" id="0" name="Picture 1"/>
+          <p:cNvPicPr>
+            <a:picLocks noGrp="1" noChangeAspect="1"/>
+          </p:cNvPicPr>
+          <p:nvPr/>
+        </p:nvPicPr>
+        <p:blipFill>
+          <a:blip r:embed="rId2"/>
+          <a:stretch>
+            <a:fillRect/>
+          </a:stretch>
+        </p:blipFill>
+        <p:spPr bwMode="auto">
+          <a:xfrm>
+            <a:off x="609600" y="1193800"/>
+            <a:ext cx="7937500" cy="3175000"/>
+          </a:xfrm>
+          <a:prstGeom prst="rect">
+            <a:avLst/>
+          </a:prstGeom>
+          <a:noFill/>
+          <a:ln w="9525">
+            <a:noFill/>
+            <a:headEnd/>
+            <a:tailEnd/>
+          </a:ln>
+        </p:spPr>
+      </p:pic>
+    </p:spTree>
+  </p:cSld>
+</p:sld>
+</file>
+
+<file path=ppt/slides/slide17.xml><?xml version="1.0" encoding="utf-8"?>
+<p:sld xmlns:a="http://schemas.openxmlformats.org/drawingml/2006/main" xmlns:r="http://schemas.openxmlformats.org/officeDocument/2006/relationships" xmlns:p="http://schemas.openxmlformats.org/presentationml/2006/main">
+  <p:cSld>
+    <p:spTree>
+      <p:nvGrpSpPr>
+        <p:cNvPr id="1" name=""/>
+        <p:cNvGrpSpPr/>
+        <p:nvPr/>
+      </p:nvGrpSpPr>
+      <p:grpSpPr>
+        <a:xfrm>
+          <a:off x="0" y="0"/>
+          <a:ext cx="0" cy="0"/>
+          <a:chOff x="0" y="0"/>
+          <a:chExt cx="0" cy="0"/>
+        </a:xfrm>
+      </p:grpSpPr>
+      <p:sp>
+        <p:nvSpPr>
+          <p:cNvPr id="2" name="Title 1"/>
+          <p:cNvSpPr>
+            <a:spLocks noGrp="1"/>
+          </p:cNvSpPr>
+          <p:nvPr>
+            <p:ph type="title"/>
+          </p:nvPr>
+        </p:nvSpPr>
+        <p:spPr>
+          <a:xfrm>
+            <a:off x="457200" y="205979"/>
+            <a:ext cx="8229600" cy="857250"/>
+          </a:xfrm>
+        </p:spPr>
+        <p:txBody>
+          <a:bodyPr/>
+          <a:lstStyle/>
+          <a:p>
+            <a:pPr lvl="0" indent="0" marL="0">
+              <a:buNone/>
+            </a:pPr>
+            <a:r>
+              <a:rPr/>
               <a:t>Takeaways</a:t>
             </a:r>
           </a:p>
@@ -3835,7 +3918,7 @@
             <a:pPr lvl="0"/>
             <a:r>
               <a:rPr/>
-              <a:t>Same AI, European labour market: </a:t>
+              <a:t>Same scenarios in European labour market: </a:t>
             </a:r>
             <a:r>
               <a:rPr b="1"/>
@@ -3846,14 +3929,14 @@
             <a:pPr lvl="1"/>
             <a:r>
               <a:rPr/>
-              <a:t>stickier cognitive wages and slower hiring turn wage cuts into job losses</a:t>
+              <a:t>stickier wages + slower hiring turn wage cuts into job losses</a:t>
             </a:r>
           </a:p>
           <a:p>
             <a:pPr lvl="0"/>
             <a:r>
               <a:rPr/>
-              <a:t>Our European scenarios: </a:t>
+              <a:t>Different European scenarios: </a:t>
             </a:r>
             <a:r>
               <a:rPr b="1"/>
@@ -3871,40 +3954,42 @@
             <a:pPr lvl="1"/>
             <a:r>
               <a:rPr/>
-              <a:t>most of the gap is </a:t>
-            </a:r>
-            <a:r>
-              <a:rPr b="1"/>
-              <a:t>adoption</a:t>
-            </a:r>
+              <a:t>most of the gap is adoption: Europe starts lower and does not catch up</a:t>
+            </a:r>
+          </a:p>
+          <a:p>
+            <a:pPr lvl="0"/>
             <a:r>
               <a:rPr/>
-              <a:t>: Europe starts lower and does not catch up</a:t>
+              <a:t>Adoption as an important lever</a:t>
+            </a:r>
+          </a:p>
+          <a:p>
+            <a:pPr lvl="1"/>
+            <a:r>
+              <a:rPr/>
+              <a:t>catching up with US adoption by 2030: gains up by two thirds, cognitive wages still rise</a:t>
+            </a:r>
+          </a:p>
+          <a:p>
+            <a:pPr lvl="1"/>
+            <a:r>
+              <a:rPr/>
+              <a:t>but in the extreme scenario unemployment then approaches the US level</a:t>
+            </a:r>
+          </a:p>
+          <a:p>
+            <a:pPr lvl="1"/>
+            <a:r>
+              <a:rPr/>
+              <a:t>ongoing work on why adoption differs so much across countries</a:t>
             </a:r>
           </a:p>
           <a:p>
             <a:pPr lvl="0"/>
             <a:r>
               <a:rPr/>
-              <a:t>Adoption is the lever</a:t>
-            </a:r>
-          </a:p>
-          <a:p>
-            <a:pPr lvl="1"/>
-            <a:r>
-              <a:rPr/>
-              <a:t>ongoing work on why adoption is lower and differs across countries</a:t>
-            </a:r>
-          </a:p>
-          <a:p>
-            <a:pPr lvl="0"/>
-            <a:r>
-              <a:rPr/>
-              <a:t>The parameters are </a:t>
-            </a:r>
-            <a:r>
-              <a:rPr b="1"/>
-              <a:t>uncertain and open for debate</a:t>
+              <a:t>These parameters are uncertain and open for debate</a:t>
             </a:r>
           </a:p>
           <a:p>
@@ -3921,7 +4006,7 @@
 </p:sld>
 </file>
 
-<file path=ppt/slides/slide17.xml><?xml version="1.0" encoding="utf-8"?>
+<file path=ppt/slides/slide18.xml><?xml version="1.0" encoding="utf-8"?>
 <p:sld xmlns:a="http://schemas.openxmlformats.org/drawingml/2006/main" xmlns:r="http://schemas.openxmlformats.org/officeDocument/2006/relationships" xmlns:p="http://schemas.openxmlformats.org/presentationml/2006/main">
   <p:cSld>
     <p:bg>
@@ -4866,7 +4951,7 @@
             <a:pPr lvl="0"/>
             <a:r>
               <a:rPr/>
-              <a:t>We build on their model in two ways:</a:t>
+              <a:t>We change their model in two ways:</a:t>
             </a:r>
           </a:p>
           <a:p>
@@ -4888,15 +4973,22 @@
             </a:r>
             <a:r>
               <a:rPr/>
-              <a:t> (and </a:t>
+              <a:t> and </a:t>
             </a:r>
             <a:r>
               <a:rPr i="1"/>
-              <a:t>will</a:t>
+              <a:t>will be able to</a:t>
             </a:r>
             <a:r>
               <a:rPr/>
-              <a:t>) do</a:t>
+              <a:t> do</a:t>
+            </a:r>
+          </a:p>
+          <a:p>
+            <a:pPr lvl="2"/>
+            <a:r>
+              <a:rPr/>
+              <a:t>disclaimer: scenarios to explore and not forecasts</a:t>
             </a:r>
           </a:p>
         </p:txBody>
@@ -5021,8 +5113,8 @@
         </p:blipFill>
         <p:spPr bwMode="auto">
           <a:xfrm>
-            <a:off x="774700" y="1193800"/>
-            <a:ext cx="7594600" cy="3175000"/>
+            <a:off x="939800" y="1193800"/>
+            <a:ext cx="7264400" cy="3175000"/>
           </a:xfrm>
           <a:prstGeom prst="rect">
             <a:avLst/>
@@ -5134,7 +5226,7 @@
             </a:pPr>
             <a:r>
               <a:rPr/>
-              <a:t>What each scenario sets for 2030</a:t>
+              <a:t>What Scenarios Set for 2030</a:t>
             </a:r>
           </a:p>
         </p:txBody>
@@ -5174,6 +5266,32 @@
                       </a:pPr>
                       <a:r>
                         <a:rPr b="1"/>
+                        <a:t>Use of AI</a:t>
+                      </a:r>
+                    </a:p>
+                  </a:txBody>
+                </a:tc>
+                <a:tc>
+                  <a:txBody>
+                    <a:bodyPr/>
+                    <a:lstStyle/>
+                    <a:p>
+                      <a:endParaRPr/>
+                    </a:p>
+                  </a:txBody>
+                </a:tc>
+              </a:tr>
+              <a:tr h="0">
+                <a:tc>
+                  <a:txBody>
+                    <a:bodyPr/>
+                    <a:lstStyle/>
+                    <a:p>
+                      <a:pPr lvl="0" indent="0" marL="0">
+                        <a:buNone/>
+                      </a:pPr>
+                      <a:r>
+                        <a:rPr/>
                         <a:t>Capability</a:t>
                       </a:r>
                     </a:p>
@@ -5205,7 +5323,7 @@
                         <a:buNone/>
                       </a:pPr>
                       <a:r>
-                        <a:rPr b="1"/>
+                        <a:rPr/>
                         <a:t>Adoption</a:t>
                       </a:r>
                     </a:p>
@@ -5238,6 +5356,32 @@
                       </a:pPr>
                       <a:r>
                         <a:rPr b="1"/>
+                        <a:t>Effect on tasks</a:t>
+                      </a:r>
+                    </a:p>
+                  </a:txBody>
+                </a:tc>
+                <a:tc>
+                  <a:txBody>
+                    <a:bodyPr/>
+                    <a:lstStyle/>
+                    <a:p>
+                      <a:endParaRPr/>
+                    </a:p>
+                  </a:txBody>
+                </a:tc>
+              </a:tr>
+              <a:tr h="0">
+                <a:tc>
+                  <a:txBody>
+                    <a:bodyPr/>
+                    <a:lstStyle/>
+                    <a:p>
+                      <a:pPr lvl="0" indent="0" marL="0">
+                        <a:buNone/>
+                      </a:pPr>
+                      <a:r>
+                        <a:rPr/>
                         <a:t>Automation</a:t>
                       </a:r>
                     </a:p>
@@ -5269,7 +5413,7 @@
                         <a:buNone/>
                       </a:pPr>
                       <a:r>
-                        <a:rPr b="1"/>
+                        <a:rPr/>
                         <a:t>New tasks</a:t>
                       </a:r>
                     </a:p>
@@ -5301,7 +5445,7 @@
                         <a:buNone/>
                       </a:pPr>
                       <a:r>
-                        <a:rPr b="1"/>
+                        <a:rPr/>
                         <a:t>Gain per task</a:t>
                       </a:r>
                     </a:p>
@@ -5333,7 +5477,97 @@
                         <a:buNone/>
                       </a:pPr>
                       <a:r>
-                        <a:rPr i="1"/>
+                        <a:rPr b="1"/>
+                        <a:t>Finding new jobs</a:t>
+                      </a:r>
+                    </a:p>
+                  </a:txBody>
+                </a:tc>
+                <a:tc>
+                  <a:txBody>
+                    <a:bodyPr/>
+                    <a:lstStyle/>
+                    <a:p>
+                      <a:endParaRPr/>
+                    </a:p>
+                  </a:txBody>
+                </a:tc>
+              </a:tr>
+              <a:tr h="0">
+                <a:tc>
+                  <a:txBody>
+                    <a:bodyPr/>
+                    <a:lstStyle/>
+                    <a:p>
+                      <a:pPr lvl="0" indent="0" marL="0">
+                        <a:buNone/>
+                      </a:pPr>
+                      <a:r>
+                        <a:rPr/>
+                        <a:t>Switching</a:t>
+                      </a:r>
+                    </a:p>
+                  </a:txBody>
+                </a:tc>
+                <a:tc>
+                  <a:txBody>
+                    <a:bodyPr/>
+                    <a:lstStyle/>
+                    <a:p>
+                      <a:pPr lvl="0" indent="0" marL="0">
+                        <a:buNone/>
+                      </a:pPr>
+                      <a:r>
+                        <a:rPr/>
+                        <a:t>how easily displaced workers get hired in other jobs</a:t>
+                      </a:r>
+                    </a:p>
+                  </a:txBody>
+                </a:tc>
+              </a:tr>
+              <a:tr h="0">
+                <a:tc>
+                  <a:txBody>
+                    <a:bodyPr/>
+                    <a:lstStyle/>
+                    <a:p>
+                      <a:pPr lvl="0" indent="0" marL="0">
+                        <a:buNone/>
+                      </a:pPr>
+                      <a:r>
+                        <a:rPr/>
+                        <a:t>Hiring speed</a:t>
+                      </a:r>
+                    </a:p>
+                  </a:txBody>
+                </a:tc>
+                <a:tc>
+                  <a:txBody>
+                    <a:bodyPr/>
+                    <a:lstStyle/>
+                    <a:p>
+                      <a:pPr lvl="0" indent="0" marL="0">
+                        <a:buNone/>
+                      </a:pPr>
+                      <a:r>
+                        <a:rPr/>
+                        <a:t>how quickly firms post vacancies for the workers they want</a:t>
+                      </a:r>
+                    </a:p>
+                  </a:txBody>
+                </a:tc>
+              </a:tr>
+              <a:tr h="0">
+                <a:tc>
+                  <a:txBody>
+                    <a:bodyPr/>
+                    <a:lstStyle/>
+                    <a:p>
+                      <a:pPr lvl="0" indent="0" marL="0">
+                        <a:buNone/>
+                      </a:pPr>
+                      <a:r>
+                        <a:rPr b="1"/>
                         <a:t>Today</a:t>
                       </a:r>
                     </a:p>
@@ -5349,32 +5583,70 @@
                       </a:pPr>
                       <a:r>
                         <a:rPr i="1"/>
-                        <a:t>Same in all scenarios:</a:t>
+                        <a:t>same in all scenarios</a:t>
                       </a:r>
                     </a:p>
+                  </a:txBody>
+                </a:tc>
+              </a:tr>
+              <a:tr h="0">
+                <a:tc>
+                  <a:txBody>
+                    <a:bodyPr/>
+                    <a:lstStyle/>
                     <a:p>
                       <a:pPr lvl="0" indent="0" marL="0">
                         <a:buNone/>
                       </a:pPr>
                       <a:r>
                         <a:rPr/>
-                        <a:t>• </a:t>
+                        <a:t>Capability</a:t>
                       </a:r>
-                      <a:r>
-                        <a:rPr i="1"/>
-                        <a:t>AI can do 14% of all work (EU: 12%)</a:t>
-                      </a:r>
-                    </a:p>
+                    </a:p>
+                  </a:txBody>
+                </a:tc>
+                <a:tc>
+                  <a:txBody>
+                    <a:bodyPr/>
+                    <a:lstStyle/>
                     <a:p>
                       <a:pPr lvl="0" indent="0" marL="0">
                         <a:buNone/>
                       </a:pPr>
                       <a:r>
                         <a:rPr/>
-                        <a:t>• </a:t>
+                        <a:t>AI can do 14% of all work (EU: 12%)</a:t>
                       </a:r>
+                    </a:p>
+                  </a:txBody>
+                </a:tc>
+              </a:tr>
+              <a:tr h="0">
+                <a:tc>
+                  <a:txBody>
+                    <a:bodyPr/>
+                    <a:lstStyle/>
+                    <a:p>
+                      <a:pPr lvl="0" indent="0" marL="0">
+                        <a:buNone/>
+                      </a:pPr>
                       <a:r>
-                        <a:rPr i="1"/>
+                        <a:rPr/>
+                        <a:t>Adoption</a:t>
+                      </a:r>
+                    </a:p>
+                  </a:txBody>
+                </a:tc>
+                <a:tc>
+                  <a:txBody>
+                    <a:bodyPr/>
+                    <a:lstStyle/>
+                    <a:p>
+                      <a:pPr lvl="0" indent="0" marL="0">
+                        <a:buNone/>
+                      </a:pPr>
+                      <a:r>
+                        <a:rPr/>
                         <a:t>of that work, 10% is actually done with AI (EU: 6%)</a:t>
                       </a:r>
                     </a:p>
@@ -5458,10 +5730,10 @@
                 <a:tableStyleId>{5C22544A-7EE6-4342-B048-85BDC9FD1C3A}</a:tableStyleId>
               </a:tblPr>
               <a:tblGrid>
-                <a:gridCol w="1587500"/>
-                <a:gridCol w="1587500"/>
-                <a:gridCol w="1587500"/>
-                <a:gridCol w="3479800"/>
+                <a:gridCol w="1397000"/>
+                <a:gridCol w="1727200"/>
+                <a:gridCol w="1435100"/>
+                <a:gridCol w="3657600"/>
               </a:tblGrid>
               <a:tr h="0">
                 <a:tc>
@@ -5533,8 +5805,52 @@
                         <a:buNone/>
                       </a:pPr>
                       <a:r>
+                        <a:rPr b="1"/>
+                        <a:t>Use of AI</a:t>
+                      </a:r>
+                    </a:p>
+                  </a:txBody>
+                </a:tc>
+                <a:tc>
+                  <a:txBody>
+                    <a:bodyPr/>
+                    <a:lstStyle/>
+                    <a:p>
+                      <a:endParaRPr/>
+                    </a:p>
+                  </a:txBody>
+                </a:tc>
+                <a:tc>
+                  <a:txBody>
+                    <a:bodyPr/>
+                    <a:lstStyle/>
+                    <a:p>
+                      <a:endParaRPr/>
+                    </a:p>
+                  </a:txBody>
+                </a:tc>
+                <a:tc>
+                  <a:txBody>
+                    <a:bodyPr/>
+                    <a:lstStyle/>
+                    <a:p>
+                      <a:endParaRPr/>
+                    </a:p>
+                  </a:txBody>
+                </a:tc>
+              </a:tr>
+              <a:tr h="0">
+                <a:tc>
+                  <a:txBody>
+                    <a:bodyPr/>
+                    <a:lstStyle/>
+                    <a:p>
+                      <a:pPr lvl="0" indent="0" marL="0">
+                        <a:buNone/>
+                      </a:pPr>
+                      <a:r>
                         <a:rPr/>
-                        <a:t>capability 2030</a:t>
+                        <a:t>Capability</a:t>
                       </a:r>
                     </a:p>
                   </a:txBody>
@@ -5596,7 +5912,7 @@
                       </a:pPr>
                       <a:r>
                         <a:rPr/>
-                        <a:t>adoption 2030</a:t>
+                        <a:t>Adoption</a:t>
                       </a:r>
                     </a:p>
                   </a:txBody>
@@ -5657,8 +5973,52 @@
                         <a:buNone/>
                       </a:pPr>
                       <a:r>
+                        <a:rPr b="1"/>
+                        <a:t>Effect on tasks</a:t>
+                      </a:r>
+                    </a:p>
+                  </a:txBody>
+                </a:tc>
+                <a:tc>
+                  <a:txBody>
+                    <a:bodyPr/>
+                    <a:lstStyle/>
+                    <a:p>
+                      <a:endParaRPr/>
+                    </a:p>
+                  </a:txBody>
+                </a:tc>
+                <a:tc>
+                  <a:txBody>
+                    <a:bodyPr/>
+                    <a:lstStyle/>
+                    <a:p>
+                      <a:endParaRPr/>
+                    </a:p>
+                  </a:txBody>
+                </a:tc>
+                <a:tc>
+                  <a:txBody>
+                    <a:bodyPr/>
+                    <a:lstStyle/>
+                    <a:p>
+                      <a:endParaRPr/>
+                    </a:p>
+                  </a:txBody>
+                </a:tc>
+              </a:tr>
+              <a:tr h="0">
+                <a:tc>
+                  <a:txBody>
+                    <a:bodyPr/>
+                    <a:lstStyle/>
+                    <a:p>
+                      <a:pPr lvl="0" indent="0" marL="0">
+                        <a:buNone/>
+                      </a:pPr>
+                      <a:r>
                         <a:rPr/>
-                        <a:t>automation</a:t>
+                        <a:t>Automation</a:t>
                       </a:r>
                     </a:p>
                   </a:txBody>
@@ -5703,7 +6063,7 @@
                       </a:pPr>
                       <a:r>
                         <a:rPr/>
-                        <a:t>usage share is an upper bound</a:t>
+                        <a:t>data counts iterations as automation</a:t>
                       </a:r>
                     </a:p>
                   </a:txBody>
@@ -5720,7 +6080,7 @@
                       </a:pPr>
                       <a:r>
                         <a:rPr/>
-                        <a:t>new tasks</a:t>
+                        <a:t>New tasks</a:t>
                       </a:r>
                     </a:p>
                   </a:txBody>
@@ -5765,7 +6125,7 @@
                       </a:pPr>
                       <a:r>
                         <a:rPr/>
-                        <a:t>EU evidence</a:t>
+                        <a:t>historically: more new tasks</a:t>
                       </a:r>
                     </a:p>
                   </a:txBody>
@@ -5782,7 +6142,7 @@
                       </a:pPr>
                       <a:r>
                         <a:rPr/>
-                        <a:t>gain per task</a:t>
+                        <a:t>Gain per task</a:t>
                       </a:r>
                     </a:p>
                   </a:txBody>
@@ -5828,6 +6188,174 @@
                       <a:r>
                         <a:rPr/>
                         <a:t>property of the tool</a:t>
+                      </a:r>
+                    </a:p>
+                  </a:txBody>
+                </a:tc>
+              </a:tr>
+              <a:tr h="0">
+                <a:tc>
+                  <a:txBody>
+                    <a:bodyPr/>
+                    <a:lstStyle/>
+                    <a:p>
+                      <a:pPr lvl="0" indent="0" marL="0">
+                        <a:buNone/>
+                      </a:pPr>
+                      <a:r>
+                        <a:rPr b="1"/>
+                        <a:t>Finding new jobs</a:t>
+                      </a:r>
+                    </a:p>
+                  </a:txBody>
+                </a:tc>
+                <a:tc>
+                  <a:txBody>
+                    <a:bodyPr/>
+                    <a:lstStyle/>
+                    <a:p>
+                      <a:endParaRPr/>
+                    </a:p>
+                  </a:txBody>
+                </a:tc>
+                <a:tc>
+                  <a:txBody>
+                    <a:bodyPr/>
+                    <a:lstStyle/>
+                    <a:p>
+                      <a:endParaRPr/>
+                    </a:p>
+                  </a:txBody>
+                </a:tc>
+                <a:tc>
+                  <a:txBody>
+                    <a:bodyPr/>
+                    <a:lstStyle/>
+                    <a:p>
+                      <a:endParaRPr/>
+                    </a:p>
+                  </a:txBody>
+                </a:tc>
+              </a:tr>
+              <a:tr h="0">
+                <a:tc>
+                  <a:txBody>
+                    <a:bodyPr/>
+                    <a:lstStyle/>
+                    <a:p>
+                      <a:pPr lvl="0" indent="0" marL="0">
+                        <a:buNone/>
+                      </a:pPr>
+                      <a:r>
+                        <a:rPr/>
+                        <a:t>Switching</a:t>
+                      </a:r>
+                    </a:p>
+                  </a:txBody>
+                </a:tc>
+                <a:tc>
+                  <a:txBody>
+                    <a:bodyPr/>
+                    <a:lstStyle/>
+                    <a:p>
+                      <a:pPr lvl="0" indent="0" marL="0">
+                        <a:buNone/>
+                      </a:pPr>
+                      <a:r>
+                        <a:rPr/>
+                        <a:t>3 / 6 / 13 months</a:t>
+                      </a:r>
+                    </a:p>
+                  </a:txBody>
+                </a:tc>
+                <a:tc>
+                  <a:txBody>
+                    <a:bodyPr/>
+                    <a:lstStyle/>
+                    <a:p>
+                      <a:pPr lvl="0" indent="0" marL="0">
+                        <a:buNone/>
+                      </a:pPr>
+                      <a:r>
+                        <a:rPr/>
+                        <a:t>same</a:t>
+                      </a:r>
+                    </a:p>
+                  </a:txBody>
+                </a:tc>
+                <a:tc>
+                  <a:txBody>
+                    <a:bodyPr/>
+                    <a:lstStyle/>
+                    <a:p>
+                      <a:pPr lvl="0" indent="0" marL="0">
+                        <a:buNone/>
+                      </a:pPr>
+                      <a:r>
+                        <a:rPr/>
+                        <a:t>no differences in retraining time</a:t>
+                      </a:r>
+                    </a:p>
+                  </a:txBody>
+                </a:tc>
+              </a:tr>
+              <a:tr h="0">
+                <a:tc>
+                  <a:txBody>
+                    <a:bodyPr/>
+                    <a:lstStyle/>
+                    <a:p>
+                      <a:pPr lvl="0" indent="0" marL="0">
+                        <a:buNone/>
+                      </a:pPr>
+                      <a:r>
+                        <a:rPr/>
+                        <a:t>Hiring speed</a:t>
+                      </a:r>
+                    </a:p>
+                  </a:txBody>
+                </a:tc>
+                <a:tc>
+                  <a:txBody>
+                    <a:bodyPr/>
+                    <a:lstStyle/>
+                    <a:p>
+                      <a:pPr lvl="0" indent="0" marL="0">
+                        <a:buNone/>
+                      </a:pPr>
+                      <a:r>
+                        <a:rPr/>
+                        <a:t>7 / 2.5 / 1 months</a:t>
+                      </a:r>
+                    </a:p>
+                  </a:txBody>
+                </a:tc>
+                <a:tc>
+                  <a:txBody>
+                    <a:bodyPr/>
+                    <a:lstStyle/>
+                    <a:p>
+                      <a:pPr lvl="0" indent="0" marL="0">
+                        <a:buNone/>
+                      </a:pPr>
+                      <a:r>
+                        <a:rPr/>
+                        <a:t>same</a:t>
+                      </a:r>
+                    </a:p>
+                  </a:txBody>
+                </a:tc>
+                <a:tc>
+                  <a:txBody>
+                    <a:bodyPr/>
+                    <a:lstStyle/>
+                    <a:p>
+                      <a:pPr lvl="0" indent="0" marL="0">
+                        <a:buNone/>
+                      </a:pPr>
+                      <a:r>
+                        <a:rPr/>
+                        <a:t>no data to estimate</a:t>
                       </a:r>
                     </a:p>
                   </a:txBody>

--- a/european_values/presentation/eu_ai_scenarios.pptx
+++ b/european_values/presentation/eu_ai_scenarios.pptx
@@ -23,6 +23,7 @@
     <p:sldId id="271" r:id="rId17"/>
     <p:sldId id="272" r:id="rId18"/>
     <p:sldId id="273" r:id="rId19"/>
+    <p:sldId id="274" r:id="rId20"/>
   </p:sldIdLst>
   <p:sldSz cx="9144000" cy="5143500" type="screen16x9"/>
   <p:notesSz cx="6858000" cy="9144000"/>
@@ -4007,6 +4008,522 @@
 </file>
 
 <file path=ppt/slides/slide18.xml><?xml version="1.0" encoding="utf-8"?>
+<p:sld xmlns:a="http://schemas.openxmlformats.org/drawingml/2006/main" xmlns:r="http://schemas.openxmlformats.org/officeDocument/2006/relationships" xmlns:p="http://schemas.openxmlformats.org/presentationml/2006/main">
+  <p:cSld>
+    <p:spTree>
+      <p:nvGrpSpPr>
+        <p:cNvPr id="1" name=""/>
+        <p:cNvGrpSpPr/>
+        <p:nvPr/>
+      </p:nvGrpSpPr>
+      <p:grpSpPr>
+        <a:xfrm>
+          <a:off x="0" y="0"/>
+          <a:ext cx="0" cy="0"/>
+          <a:chOff x="0" y="0"/>
+          <a:chExt cx="0" cy="0"/>
+        </a:xfrm>
+      </p:grpSpPr>
+      <p:sp>
+        <p:nvSpPr>
+          <p:cNvPr id="2" name="Title 1"/>
+          <p:cNvSpPr>
+            <a:spLocks noGrp="1"/>
+          </p:cNvSpPr>
+          <p:nvPr>
+            <p:ph type="title"/>
+          </p:nvPr>
+        </p:nvSpPr>
+        <p:spPr>
+          <a:xfrm>
+            <a:off x="457200" y="205979"/>
+            <a:ext cx="8229600" cy="857250"/>
+          </a:xfrm>
+        </p:spPr>
+        <p:txBody>
+          <a:bodyPr/>
+          <a:lstStyle/>
+          <a:p>
+            <a:pPr lvl="0" indent="0" marL="0">
+              <a:buNone/>
+            </a:pPr>
+            <a:r>
+              <a:rPr/>
+              <a:t>Comparison with the JRC’s EDGE simulation</a:t>
+            </a:r>
+          </a:p>
+        </p:txBody>
+      </p:sp>
+      <p:graphicFrame>
+        <p:nvGraphicFramePr>
+          <p:cNvPr id="6" name="Content Placeholder 5"/>
+          <p:cNvGraphicFramePr>
+            <a:graphicFrameLocks noGrp="1"/>
+          </p:cNvGraphicFramePr>
+          <p:nvPr>
+            <p:ph idx="1"/>
+          </p:nvPr>
+        </p:nvGraphicFramePr>
+        <p:xfrm>
+          <a:off x="457200" y="1193800"/>
+          <a:ext cx="8229600" cy="3175000"/>
+        </p:xfrm>
+        <a:graphic>
+          <a:graphicData uri="http://schemas.openxmlformats.org/drawingml/2006/table">
+            <a:tbl>
+              <a:tblPr firstRow="1" bandRow="1">
+                <a:tableStyleId>{5C22544A-7EE6-4342-B048-85BDC9FD1C3A}</a:tableStyleId>
+              </a:tblPr>
+              <a:tblGrid>
+                <a:gridCol w="1397000"/>
+                <a:gridCol w="3416300"/>
+                <a:gridCol w="3416300"/>
+              </a:tblGrid>
+              <a:tr h="0">
+                <a:tc>
+                  <a:txBody>
+                    <a:bodyPr/>
+                    <a:lstStyle/>
+                    <a:p>
+                      <a:endParaRPr/>
+                    </a:p>
+                  </a:txBody>
+                  <a:tcPr/>
+                </a:tc>
+                <a:tc>
+                  <a:txBody>
+                    <a:bodyPr/>
+                    <a:lstStyle/>
+                    <a:p>
+                      <a:pPr lvl="0" indent="0" marL="0">
+                        <a:buNone/>
+                      </a:pPr>
+                      <a:r>
+                        <a:rPr/>
+                        <a:t>Our scenarios</a:t>
+                      </a:r>
+                    </a:p>
+                  </a:txBody>
+                  <a:tcPr/>
+                </a:tc>
+                <a:tc>
+                  <a:txBody>
+                    <a:bodyPr/>
+                    <a:lstStyle/>
+                    <a:p>
+                      <a:pPr lvl="0" indent="0" marL="0">
+                        <a:buNone/>
+                      </a:pPr>
+                      <a:r>
+                        <a:rPr/>
+                        <a:t>JRC EDGE-EUROMOD</a:t>
+                      </a:r>
+                    </a:p>
+                  </a:txBody>
+                  <a:tcPr/>
+                </a:tc>
+              </a:tr>
+              <a:tr h="0">
+                <a:tc>
+                  <a:txBody>
+                    <a:bodyPr/>
+                    <a:lstStyle/>
+                    <a:p>
+                      <a:pPr lvl="0" indent="0" marL="0">
+                        <a:buNone/>
+                      </a:pPr>
+                      <a:r>
+                        <a:rPr b="1"/>
+                        <a:t>Similar</a:t>
+                      </a:r>
+                    </a:p>
+                  </a:txBody>
+                </a:tc>
+                <a:tc>
+                  <a:txBody>
+                    <a:bodyPr/>
+                    <a:lstStyle/>
+                    <a:p>
+                      <a:endParaRPr/>
+                    </a:p>
+                  </a:txBody>
+                </a:tc>
+                <a:tc>
+                  <a:txBody>
+                    <a:bodyPr/>
+                    <a:lstStyle/>
+                    <a:p>
+                      <a:endParaRPr/>
+                    </a:p>
+                  </a:txBody>
+                </a:tc>
+              </a:tr>
+              <a:tr h="0">
+                <a:tc>
+                  <a:txBody>
+                    <a:bodyPr/>
+                    <a:lstStyle/>
+                    <a:p>
+                      <a:pPr lvl="0" indent="0" marL="0">
+                        <a:buNone/>
+                      </a:pPr>
+                      <a:r>
+                        <a:rPr/>
+                        <a:t>Scenarios</a:t>
+                      </a:r>
+                    </a:p>
+                  </a:txBody>
+                </a:tc>
+                <a:tc>
+                  <a:txBody>
+                    <a:bodyPr/>
+                    <a:lstStyle/>
+                    <a:p>
+                      <a:pPr lvl="0" indent="0" marL="0">
+                        <a:buNone/>
+                      </a:pPr>
+                      <a:r>
+                        <a:rPr/>
+                        <a:t>modest / substantial / high impact by 2030</a:t>
+                      </a:r>
+                    </a:p>
+                  </a:txBody>
+                </a:tc>
+                <a:tc>
+                  <a:txBody>
+                    <a:bodyPr/>
+                    <a:lstStyle/>
+                    <a:p>
+                      <a:pPr lvl="0" indent="0" marL="0">
+                        <a:buNone/>
+                      </a:pPr>
+                      <a:r>
+                        <a:rPr/>
+                        <a:t>low / medium / high impact by 2035</a:t>
+                      </a:r>
+                    </a:p>
+                  </a:txBody>
+                </a:tc>
+              </a:tr>
+              <a:tr h="0">
+                <a:tc>
+                  <a:txBody>
+                    <a:bodyPr/>
+                    <a:lstStyle/>
+                    <a:p>
+                      <a:pPr lvl="0" indent="0" marL="0">
+                        <a:buNone/>
+                      </a:pPr>
+                      <a:r>
+                        <a:rPr b="1"/>
+                        <a:t>Different</a:t>
+                      </a:r>
+                    </a:p>
+                  </a:txBody>
+                </a:tc>
+                <a:tc>
+                  <a:txBody>
+                    <a:bodyPr/>
+                    <a:lstStyle/>
+                    <a:p>
+                      <a:endParaRPr/>
+                    </a:p>
+                  </a:txBody>
+                </a:tc>
+                <a:tc>
+                  <a:txBody>
+                    <a:bodyPr/>
+                    <a:lstStyle/>
+                    <a:p>
+                      <a:endParaRPr/>
+                    </a:p>
+                  </a:txBody>
+                </a:tc>
+              </a:tr>
+              <a:tr h="0">
+                <a:tc>
+                  <a:txBody>
+                    <a:bodyPr/>
+                    <a:lstStyle/>
+                    <a:p>
+                      <a:pPr lvl="0" indent="0" marL="0">
+                        <a:buNone/>
+                      </a:pPr>
+                      <a:r>
+                        <a:rPr/>
+                        <a:t>Assumptions</a:t>
+                      </a:r>
+                    </a:p>
+                  </a:txBody>
+                </a:tc>
+                <a:tc>
+                  <a:txBody>
+                    <a:bodyPr/>
+                    <a:lstStyle/>
+                    <a:p>
+                      <a:pPr lvl="0" indent="0" marL="0">
+                        <a:buNone/>
+                      </a:pPr>
+                      <a:r>
+                        <a:rPr/>
+                        <a:t>what AI can do + how much it is used</a:t>
+                      </a:r>
+                    </a:p>
+                  </a:txBody>
+                </a:tc>
+                <a:tc>
+                  <a:txBody>
+                    <a:bodyPr/>
+                    <a:lstStyle/>
+                    <a:p>
+                      <a:pPr lvl="0" indent="0" marL="0">
+                        <a:buNone/>
+                      </a:pPr>
+                      <a:r>
+                        <a:rPr i="1"/>
+                        <a:t>outcomes</a:t>
+                      </a:r>
+                      <a:r>
+                        <a:rPr/>
+                        <a:t> like TFP, wages, unemployment</a:t>
+                      </a:r>
+                    </a:p>
+                  </a:txBody>
+                </a:tc>
+              </a:tr>
+              <a:tr h="0">
+                <a:tc>
+                  <a:txBody>
+                    <a:bodyPr/>
+                    <a:lstStyle/>
+                    <a:p>
+                      <a:pPr lvl="0" indent="0" marL="0">
+                        <a:buNone/>
+                      </a:pPr>
+                      <a:r>
+                        <a:rPr/>
+                        <a:t>Results</a:t>
+                      </a:r>
+                    </a:p>
+                  </a:txBody>
+                </a:tc>
+                <a:tc>
+                  <a:txBody>
+                    <a:bodyPr/>
+                    <a:lstStyle/>
+                    <a:p>
+                      <a:pPr lvl="0" indent="0" marL="0">
+                        <a:buNone/>
+                      </a:pPr>
+                      <a:r>
+                        <a:rPr/>
+                        <a:t>GDP + labour market impact</a:t>
+                      </a:r>
+                    </a:p>
+                  </a:txBody>
+                </a:tc>
+                <a:tc>
+                  <a:txBody>
+                    <a:bodyPr/>
+                    <a:lstStyle/>
+                    <a:p>
+                      <a:pPr lvl="0" indent="0" marL="0">
+                        <a:buNone/>
+                      </a:pPr>
+                      <a:r>
+                        <a:rPr/>
+                        <a:t>distributional effects of given shock</a:t>
+                      </a:r>
+                    </a:p>
+                  </a:txBody>
+                </a:tc>
+              </a:tr>
+              <a:tr h="0">
+                <a:tc>
+                  <a:txBody>
+                    <a:bodyPr/>
+                    <a:lstStyle/>
+                    <a:p>
+                      <a:pPr lvl="0" indent="0" marL="0">
+                        <a:buNone/>
+                      </a:pPr>
+                      <a:r>
+                        <a:rPr/>
+                        <a:t>Dynamics</a:t>
+                      </a:r>
+                    </a:p>
+                  </a:txBody>
+                </a:tc>
+                <a:tc>
+                  <a:txBody>
+                    <a:bodyPr/>
+                    <a:lstStyle/>
+                    <a:p>
+                      <a:pPr lvl="0" indent="0" marL="0">
+                        <a:buNone/>
+                      </a:pPr>
+                      <a:r>
+                        <a:rPr/>
+                        <a:t>better AI → more use → jobs adjust</a:t>
+                      </a:r>
+                    </a:p>
+                  </a:txBody>
+                </a:tc>
+                <a:tc>
+                  <a:txBody>
+                    <a:bodyPr/>
+                    <a:lstStyle/>
+                    <a:p>
+                      <a:pPr lvl="0" indent="0" marL="0">
+                        <a:buNone/>
+                      </a:pPr>
+                      <a:r>
+                        <a:rPr/>
+                        <a:t>same AI → 3.6×* use → 3.6× effects</a:t>
+                      </a:r>
+                    </a:p>
+                  </a:txBody>
+                </a:tc>
+              </a:tr>
+              <a:tr h="0">
+                <a:tc>
+                  <a:txBody>
+                    <a:bodyPr/>
+                    <a:lstStyle/>
+                    <a:p>
+                      <a:pPr lvl="0" indent="0" marL="0">
+                        <a:buNone/>
+                      </a:pPr>
+                      <a:r>
+                        <a:rPr/>
+                        <a:t>Labour market</a:t>
+                      </a:r>
+                    </a:p>
+                  </a:txBody>
+                </a:tc>
+                <a:tc>
+                  <a:txBody>
+                    <a:bodyPr/>
+                    <a:lstStyle/>
+                    <a:p>
+                      <a:pPr lvl="0" indent="0" marL="0">
+                        <a:buNone/>
+                      </a:pPr>
+                      <a:r>
+                        <a:rPr/>
+                        <a:t>job search, switching, sticky wages</a:t>
+                      </a:r>
+                    </a:p>
+                  </a:txBody>
+                </a:tc>
+                <a:tc>
+                  <a:txBody>
+                    <a:bodyPr/>
+                    <a:lstStyle/>
+                    <a:p>
+                      <a:pPr lvl="0" indent="0" marL="0">
+                        <a:buNone/>
+                      </a:pPr>
+                      <a:r>
+                        <a:rPr/>
+                        <a:t>none: effects imposed directly</a:t>
+                      </a:r>
+                    </a:p>
+                  </a:txBody>
+                </a:tc>
+              </a:tr>
+              <a:tr h="0">
+                <a:tc>
+                  <a:txBody>
+                    <a:bodyPr/>
+                    <a:lstStyle/>
+                    <a:p>
+                      <a:pPr lvl="0" indent="0" marL="0">
+                        <a:buNone/>
+                      </a:pPr>
+                      <a:r>
+                        <a:rPr/>
+                        <a:t>Coverage</a:t>
+                      </a:r>
+                    </a:p>
+                  </a:txBody>
+                </a:tc>
+                <a:tc>
+                  <a:txBody>
+                    <a:bodyPr/>
+                    <a:lstStyle/>
+                    <a:p>
+                      <a:pPr lvl="0" indent="0" marL="0">
+                        <a:buNone/>
+                      </a:pPr>
+                      <a:r>
+                        <a:rPr/>
+                        <a:t>EU aggregate, two occupation groups</a:t>
+                      </a:r>
+                    </a:p>
+                  </a:txBody>
+                </a:tc>
+                <a:tc>
+                  <a:txBody>
+                    <a:bodyPr/>
+                    <a:lstStyle/>
+                    <a:p>
+                      <a:pPr lvl="0" indent="0" marL="0">
+                        <a:buNone/>
+                      </a:pPr>
+                      <a:r>
+                        <a:rPr/>
+                        <a:t>DE, ES, PL, SE; age and gender</a:t>
+                      </a:r>
+                    </a:p>
+                  </a:txBody>
+                </a:tc>
+              </a:tr>
+              <a:tr h="0">
+                <a:tc>
+                  <a:txBody>
+                    <a:bodyPr/>
+                    <a:lstStyle/>
+                    <a:p>
+                      <a:endParaRPr/>
+                    </a:p>
+                  </a:txBody>
+                </a:tc>
+                <a:tc>
+                  <a:txBody>
+                    <a:bodyPr/>
+                    <a:lstStyle/>
+                    <a:p>
+                      <a:endParaRPr/>
+                    </a:p>
+                  </a:txBody>
+                </a:tc>
+                <a:tc>
+                  <a:txBody>
+                    <a:bodyPr/>
+                    <a:lstStyle/>
+                    <a:p>
+                      <a:pPr lvl="0" indent="0" marL="0">
+                        <a:buNone/>
+                      </a:pPr>
+                      <a:r>
+                        <a:rPr/>
+                        <a:t>* growth in AI use that takes the most exposed occupations to full adoption</a:t>
+                      </a:r>
+                    </a:p>
+                  </a:txBody>
+                </a:tc>
+              </a:tr>
+            </a:tbl>
+          </a:graphicData>
+        </a:graphic>
+      </p:graphicFrame>
+    </p:spTree>
+  </p:cSld>
+</p:sld>
+</file>
+
+<file path=ppt/slides/slide19.xml><?xml version="1.0" encoding="utf-8"?>
 <p:sld xmlns:a="http://schemas.openxmlformats.org/drawingml/2006/main" xmlns:r="http://schemas.openxmlformats.org/officeDocument/2006/relationships" xmlns:p="http://schemas.openxmlformats.org/presentationml/2006/main">
   <p:cSld>
     <p:bg>

--- a/european_values/presentation/eu_ai_scenarios.pptx
+++ b/european_values/presentation/eu_ai_scenarios.pptx
@@ -24,6 +24,9 @@
     <p:sldId id="272" r:id="rId18"/>
     <p:sldId id="273" r:id="rId19"/>
     <p:sldId id="274" r:id="rId20"/>
+    <p:sldId id="275" r:id="rId21"/>
+    <p:sldId id="276" r:id="rId22"/>
+    <p:sldId id="277" r:id="rId23"/>
   </p:sldIdLst>
   <p:sldSz cx="9144000" cy="5143500" type="screen16x9"/>
   <p:notesSz cx="6858000" cy="9144000"/>
@@ -3172,191 +3175,558 @@
           </a:p>
         </p:txBody>
       </p:sp>
-      <p:sp>
-        <p:nvSpPr>
-          <p:cNvPr id="3" name="Content Placeholder 2"/>
-          <p:cNvSpPr>
-            <a:spLocks noGrp="1"/>
-          </p:cNvSpPr>
+      <p:graphicFrame>
+        <p:nvGraphicFramePr>
+          <p:cNvPr id="6" name="Content Placeholder 5"/>
+          <p:cNvGraphicFramePr>
+            <a:graphicFrameLocks noGrp="1"/>
+          </p:cNvGraphicFramePr>
           <p:nvPr>
             <p:ph idx="1"/>
           </p:nvPr>
-        </p:nvSpPr>
-        <p:spPr/>
-        <p:txBody>
-          <a:bodyPr/>
-          <a:lstStyle/>
-          <a:p>
-            <a:pPr lvl="0"/>
-            <a:r>
-              <a:rPr b="1"/>
-              <a:t>US Economy</a:t>
-            </a:r>
-            <a:r>
-              <a:rPr/>
-              <a:t>: the paper as published</a:t>
-            </a:r>
-          </a:p>
-          <a:p>
-            <a:pPr lvl="0"/>
-            <a:r>
-              <a:rPr lang="en-US" dirty="0">
-                <a:solidFill>
-                  <a:srgbClr val="FF712C"/>
-                </a:solidFill>
-              </a:rPr>
-              <a:t>EU</a:t>
-            </a:r>
-            <a:r>
-              <a:rPr lang="en-US" dirty="0">
-                <a:solidFill>
-                  <a:srgbClr val="FF712C"/>
-                </a:solidFill>
-              </a:rPr>
-              <a:t> </a:t>
-            </a:r>
-            <a:r>
-              <a:rPr lang="en-US" dirty="0">
-                <a:solidFill>
-                  <a:srgbClr val="FF712C"/>
-                </a:solidFill>
-              </a:rPr>
-              <a:t>Economy</a:t>
-            </a:r>
-            <a:r>
-              <a:rPr lang="en-US" dirty="0">
-                <a:solidFill>
-                  <a:srgbClr val="FF712C"/>
-                </a:solidFill>
-              </a:rPr>
-              <a:t> </a:t>
-            </a:r>
-            <a:r>
-              <a:rPr lang="en-US" dirty="0">
-                <a:solidFill>
-                  <a:srgbClr val="FF712C"/>
-                </a:solidFill>
-              </a:rPr>
-              <a:t>w.</a:t>
-            </a:r>
-            <a:r>
-              <a:rPr lang="en-US" dirty="0">
-                <a:solidFill>
-                  <a:srgbClr val="FF712C"/>
-                </a:solidFill>
-              </a:rPr>
-              <a:t> </a:t>
-            </a:r>
-            <a:r>
-              <a:rPr lang="en-US" dirty="0">
-                <a:solidFill>
-                  <a:srgbClr val="FF712C"/>
-                </a:solidFill>
-              </a:rPr>
-              <a:t>US</a:t>
-            </a:r>
-            <a:r>
-              <a:rPr lang="en-US" dirty="0">
-                <a:solidFill>
-                  <a:srgbClr val="FF712C"/>
-                </a:solidFill>
-              </a:rPr>
-              <a:t> </a:t>
-            </a:r>
-            <a:r>
-              <a:rPr lang="en-US" dirty="0">
-                <a:solidFill>
-                  <a:srgbClr val="FF712C"/>
-                </a:solidFill>
-              </a:rPr>
-              <a:t>Scenarios</a:t>
-            </a:r>
-            <a:r>
-              <a:rPr/>
-              <a:t>: European labour market w. US Scenarios</a:t>
-            </a:r>
-          </a:p>
-          <a:p>
-            <a:pPr lvl="0"/>
-            <a:r>
-              <a:rPr lang="en-US" dirty="0">
-                <a:solidFill>
-                  <a:srgbClr val="003399"/>
-                </a:solidFill>
-              </a:rPr>
-              <a:t>EU</a:t>
-            </a:r>
-            <a:r>
-              <a:rPr lang="en-US" dirty="0">
-                <a:solidFill>
-                  <a:srgbClr val="003399"/>
-                </a:solidFill>
-              </a:rPr>
-              <a:t> </a:t>
-            </a:r>
-            <a:r>
-              <a:rPr lang="en-US" dirty="0">
-                <a:solidFill>
-                  <a:srgbClr val="003399"/>
-                </a:solidFill>
-              </a:rPr>
-              <a:t>Economy</a:t>
-            </a:r>
-            <a:r>
-              <a:rPr lang="en-US" dirty="0">
-                <a:solidFill>
-                  <a:srgbClr val="003399"/>
-                </a:solidFill>
-              </a:rPr>
-              <a:t> </a:t>
-            </a:r>
-            <a:r>
-              <a:rPr lang="en-US" dirty="0">
-                <a:solidFill>
-                  <a:srgbClr val="003399"/>
-                </a:solidFill>
-              </a:rPr>
-              <a:t>w.</a:t>
-            </a:r>
-            <a:r>
-              <a:rPr lang="en-US" dirty="0">
-                <a:solidFill>
-                  <a:srgbClr val="003399"/>
-                </a:solidFill>
-              </a:rPr>
-              <a:t> </a:t>
-            </a:r>
-            <a:r>
-              <a:rPr lang="en-US" dirty="0">
-                <a:solidFill>
-                  <a:srgbClr val="003399"/>
-                </a:solidFill>
-              </a:rPr>
-              <a:t>EMPL</a:t>
-            </a:r>
-            <a:r>
-              <a:rPr lang="en-US" dirty="0">
-                <a:solidFill>
-                  <a:srgbClr val="003399"/>
-                </a:solidFill>
-              </a:rPr>
-              <a:t> </a:t>
-            </a:r>
-            <a:r>
-              <a:rPr lang="en-US" dirty="0">
-                <a:solidFill>
-                  <a:srgbClr val="003399"/>
-                </a:solidFill>
-              </a:rPr>
-              <a:t>Scenarios</a:t>
-            </a:r>
-            <a:r>
-              <a:rPr/>
-              <a:t>: European labour market w. our scenarios</a:t>
-            </a:r>
-          </a:p>
-        </p:txBody>
-      </p:sp>
+        </p:nvGraphicFramePr>
+        <p:xfrm>
+          <a:off x="457200" y="1193800"/>
+          <a:ext cx="8229600" cy="3175000"/>
+        </p:xfrm>
+        <a:graphic>
+          <a:graphicData uri="http://schemas.openxmlformats.org/drawingml/2006/table">
+            <a:tbl>
+              <a:tblPr firstRow="0" bandRow="1">
+                <a:tableStyleId>{5C22544A-7EE6-4342-B048-85BDC9FD1C3A}</a:tableStyleId>
+              </a:tblPr>
+              <a:tblGrid>
+                <a:gridCol w="2984500"/>
+                <a:gridCol w="3086100"/>
+                <a:gridCol w="2159000"/>
+              </a:tblGrid>
+              <a:tr h="0">
+                <a:tc>
+                  <a:txBody>
+                    <a:bodyPr/>
+                    <a:lstStyle/>
+                    <a:p>
+                      <a:pPr lvl="0" indent="0" marL="0">
+                        <a:buNone/>
+                      </a:pPr>
+                      <a:r>
+                        <a:rPr b="1"/>
+                        <a:t>Three sets of results</a:t>
+                      </a:r>
+                    </a:p>
+                  </a:txBody>
+                </a:tc>
+                <a:tc>
+                  <a:txBody>
+                    <a:bodyPr/>
+                    <a:lstStyle/>
+                    <a:p>
+                      <a:pPr lvl="0" indent="0" marL="0">
+                        <a:buNone/>
+                      </a:pPr>
+                      <a:r>
+                        <a:rPr b="1"/>
+                        <a:t>Economy</a:t>
+                      </a:r>
+                    </a:p>
+                  </a:txBody>
+                </a:tc>
+                <a:tc>
+                  <a:txBody>
+                    <a:bodyPr/>
+                    <a:lstStyle/>
+                    <a:p>
+                      <a:pPr lvl="0" indent="0" marL="0">
+                        <a:buNone/>
+                      </a:pPr>
+                      <a:r>
+                        <a:rPr b="1"/>
+                        <a:t>Scenarios</a:t>
+                      </a:r>
+                    </a:p>
+                  </a:txBody>
+                </a:tc>
+              </a:tr>
+              <a:tr h="0">
+                <a:tc>
+                  <a:txBody>
+                    <a:bodyPr/>
+                    <a:lstStyle/>
+                    <a:p>
+                      <a:pPr lvl="0" indent="0" marL="0">
+                        <a:buNone/>
+                      </a:pPr>
+                      <a:r>
+                        <a:rPr/>
+                        <a:t>US Economy</a:t>
+                      </a:r>
+                    </a:p>
+                  </a:txBody>
+                </a:tc>
+                <a:tc>
+                  <a:txBody>
+                    <a:bodyPr/>
+                    <a:lstStyle/>
+                    <a:p>
+                      <a:pPr lvl="0" indent="0" marL="0">
+                        <a:buNone/>
+                      </a:pPr>
+                      <a:r>
+                        <a:rPr/>
+                        <a:t>US</a:t>
+                      </a:r>
+                    </a:p>
+                  </a:txBody>
+                </a:tc>
+                <a:tc>
+                  <a:txBody>
+                    <a:bodyPr/>
+                    <a:lstStyle/>
+                    <a:p>
+                      <a:pPr lvl="0" indent="0" marL="0">
+                        <a:buNone/>
+                      </a:pPr>
+                      <a:r>
+                        <a:rPr/>
+                        <a:t>Korinek Paper</a:t>
+                      </a:r>
+                    </a:p>
+                  </a:txBody>
+                </a:tc>
+              </a:tr>
+              <a:tr h="0">
+                <a:tc>
+                  <a:txBody>
+                    <a:bodyPr/>
+                    <a:lstStyle/>
+                    <a:p>
+                      <a:pPr lvl="0" indent="0" marL="0">
+                        <a:buNone/>
+                      </a:pPr>
+                      <a:r>
+                        <a:rPr/>
+                        <a:t>EU Economy w. US Scenarios</a:t>
+                      </a:r>
+                    </a:p>
+                  </a:txBody>
+                </a:tc>
+                <a:tc>
+                  <a:txBody>
+                    <a:bodyPr/>
+                    <a:lstStyle/>
+                    <a:p>
+                      <a:pPr lvl="0" indent="0" marL="0">
+                        <a:buNone/>
+                      </a:pPr>
+                      <a:r>
+                        <a:rPr/>
+                        <a:t>EU</a:t>
+                      </a:r>
+                    </a:p>
+                  </a:txBody>
+                </a:tc>
+                <a:tc>
+                  <a:txBody>
+                    <a:bodyPr/>
+                    <a:lstStyle/>
+                    <a:p>
+                      <a:pPr lvl="0" indent="0" marL="0">
+                        <a:buNone/>
+                      </a:pPr>
+                      <a:r>
+                        <a:rPr/>
+                        <a:t>Korinek Paper</a:t>
+                      </a:r>
+                    </a:p>
+                  </a:txBody>
+                </a:tc>
+              </a:tr>
+              <a:tr h="0">
+                <a:tc>
+                  <a:txBody>
+                    <a:bodyPr/>
+                    <a:lstStyle/>
+                    <a:p>
+                      <a:pPr lvl="0" indent="0" marL="0">
+                        <a:buNone/>
+                      </a:pPr>
+                      <a:r>
+                        <a:rPr lang="en-US" dirty="0">
+                          <a:solidFill>
+                            <a:srgbClr val="003399"/>
+                          </a:solidFill>
+                        </a:rPr>
+                        <a:t>EU</a:t>
+                      </a:r>
+                      <a:r>
+                        <a:rPr lang="en-US" dirty="0">
+                          <a:solidFill>
+                            <a:srgbClr val="003399"/>
+                          </a:solidFill>
+                        </a:rPr>
+                        <a:t> </a:t>
+                      </a:r>
+                      <a:r>
+                        <a:rPr lang="en-US" dirty="0">
+                          <a:solidFill>
+                            <a:srgbClr val="003399"/>
+                          </a:solidFill>
+                        </a:rPr>
+                        <a:t>Economy</a:t>
+                      </a:r>
+                      <a:r>
+                        <a:rPr lang="en-US" dirty="0">
+                          <a:solidFill>
+                            <a:srgbClr val="003399"/>
+                          </a:solidFill>
+                        </a:rPr>
+                        <a:t> </a:t>
+                      </a:r>
+                      <a:r>
+                        <a:rPr lang="en-US" dirty="0">
+                          <a:solidFill>
+                            <a:srgbClr val="003399"/>
+                          </a:solidFill>
+                        </a:rPr>
+                        <a:t>w.</a:t>
+                      </a:r>
+                      <a:r>
+                        <a:rPr lang="en-US" dirty="0">
+                          <a:solidFill>
+                            <a:srgbClr val="003399"/>
+                          </a:solidFill>
+                        </a:rPr>
+                        <a:t> </a:t>
+                      </a:r>
+                      <a:r>
+                        <a:rPr lang="en-US" dirty="0">
+                          <a:solidFill>
+                            <a:srgbClr val="003399"/>
+                          </a:solidFill>
+                        </a:rPr>
+                        <a:t>EMPL</a:t>
+                      </a:r>
+                      <a:r>
+                        <a:rPr lang="en-US" dirty="0">
+                          <a:solidFill>
+                            <a:srgbClr val="003399"/>
+                          </a:solidFill>
+                        </a:rPr>
+                        <a:t> </a:t>
+                      </a:r>
+                      <a:r>
+                        <a:rPr lang="en-US" dirty="0">
+                          <a:solidFill>
+                            <a:srgbClr val="003399"/>
+                          </a:solidFill>
+                        </a:rPr>
+                        <a:t>Scenarios</a:t>
+                      </a:r>
+                    </a:p>
+                  </a:txBody>
+                </a:tc>
+                <a:tc>
+                  <a:txBody>
+                    <a:bodyPr/>
+                    <a:lstStyle/>
+                    <a:p>
+                      <a:pPr lvl="0" indent="0" marL="0">
+                        <a:buNone/>
+                      </a:pPr>
+                      <a:r>
+                        <a:rPr/>
+                        <a:t>EU</a:t>
+                      </a:r>
+                    </a:p>
+                  </a:txBody>
+                </a:tc>
+                <a:tc>
+                  <a:txBody>
+                    <a:bodyPr/>
+                    <a:lstStyle/>
+                    <a:p>
+                      <a:pPr lvl="0" indent="0" marL="0">
+                        <a:buNone/>
+                      </a:pPr>
+                      <a:r>
+                        <a:rPr/>
+                        <a:t>EMPL</a:t>
+                      </a:r>
+                    </a:p>
+                  </a:txBody>
+                </a:tc>
+              </a:tr>
+              <a:tr h="0">
+                <a:tc>
+                  <a:txBody>
+                    <a:bodyPr/>
+                    <a:lstStyle/>
+                    <a:p>
+                      <a:pPr lvl="0" indent="0" marL="0">
+                        <a:buNone/>
+                      </a:pPr>
+                      <a:r>
+                        <a:rPr b="1"/>
+                        <a:t>What if</a:t>
+                      </a:r>
+                    </a:p>
+                  </a:txBody>
+                </a:tc>
+                <a:tc>
+                  <a:txBody>
+                    <a:bodyPr/>
+                    <a:lstStyle/>
+                    <a:p>
+                      <a:endParaRPr/>
+                    </a:p>
+                  </a:txBody>
+                </a:tc>
+                <a:tc>
+                  <a:txBody>
+                    <a:bodyPr/>
+                    <a:lstStyle/>
+                    <a:p>
+                      <a:endParaRPr/>
+                    </a:p>
+                  </a:txBody>
+                </a:tc>
+              </a:tr>
+              <a:tr h="0">
+                <a:tc>
+                  <a:txBody>
+                    <a:bodyPr/>
+                    <a:lstStyle/>
+                    <a:p>
+                      <a:pPr lvl="0" indent="0" marL="0">
+                        <a:buNone/>
+                      </a:pPr>
+                      <a:r>
+                        <a:rPr lang="en-US" dirty="0">
+                          <a:solidFill>
+                            <a:srgbClr val="003399"/>
+                          </a:solidFill>
+                        </a:rPr>
+                        <a:t>EU</a:t>
+                      </a:r>
+                      <a:r>
+                        <a:rPr lang="en-US" dirty="0">
+                          <a:solidFill>
+                            <a:srgbClr val="003399"/>
+                          </a:solidFill>
+                        </a:rPr>
+                        <a:t> </a:t>
+                      </a:r>
+                      <a:r>
+                        <a:rPr lang="en-US" dirty="0">
+                          <a:solidFill>
+                            <a:srgbClr val="003399"/>
+                          </a:solidFill>
+                        </a:rPr>
+                        <a:t>Economy</a:t>
+                      </a:r>
+                      <a:r>
+                        <a:rPr lang="en-US" dirty="0">
+                          <a:solidFill>
+                            <a:srgbClr val="003399"/>
+                          </a:solidFill>
+                        </a:rPr>
+                        <a:t> </a:t>
+                      </a:r>
+                      <a:r>
+                        <a:rPr lang="en-US" dirty="0">
+                          <a:solidFill>
+                            <a:srgbClr val="003399"/>
+                          </a:solidFill>
+                        </a:rPr>
+                        <a:t>w.</a:t>
+                      </a:r>
+                      <a:r>
+                        <a:rPr lang="en-US" dirty="0">
+                          <a:solidFill>
+                            <a:srgbClr val="003399"/>
+                          </a:solidFill>
+                        </a:rPr>
+                        <a:t> </a:t>
+                      </a:r>
+                      <a:r>
+                        <a:rPr lang="en-US" dirty="0">
+                          <a:solidFill>
+                            <a:srgbClr val="003399"/>
+                          </a:solidFill>
+                        </a:rPr>
+                        <a:t>US</a:t>
+                      </a:r>
+                      <a:r>
+                        <a:rPr lang="en-US" dirty="0">
+                          <a:solidFill>
+                            <a:srgbClr val="003399"/>
+                          </a:solidFill>
+                        </a:rPr>
+                        <a:t> </a:t>
+                      </a:r>
+                      <a:r>
+                        <a:rPr lang="en-US" dirty="0">
+                          <a:solidFill>
+                            <a:srgbClr val="003399"/>
+                          </a:solidFill>
+                        </a:rPr>
+                        <a:t>Adoption</a:t>
+                      </a:r>
+                    </a:p>
+                  </a:txBody>
+                </a:tc>
+                <a:tc>
+                  <a:txBody>
+                    <a:bodyPr/>
+                    <a:lstStyle/>
+                    <a:p>
+                      <a:pPr lvl="0" indent="0" marL="0">
+                        <a:buNone/>
+                      </a:pPr>
+                      <a:r>
+                        <a:rPr/>
+                        <a:t>EU</a:t>
+                      </a:r>
+                    </a:p>
+                  </a:txBody>
+                </a:tc>
+                <a:tc>
+                  <a:txBody>
+                    <a:bodyPr/>
+                    <a:lstStyle/>
+                    <a:p>
+                      <a:pPr lvl="0" indent="0" marL="0">
+                        <a:buNone/>
+                      </a:pPr>
+                      <a:r>
+                        <a:rPr/>
+                        <a:t>EMPL but US adoption</a:t>
+                      </a:r>
+                    </a:p>
+                  </a:txBody>
+                </a:tc>
+              </a:tr>
+              <a:tr h="0">
+                <a:tc>
+                  <a:txBody>
+                    <a:bodyPr/>
+                    <a:lstStyle/>
+                    <a:p>
+                      <a:pPr lvl="0" indent="0" marL="0">
+                        <a:buNone/>
+                      </a:pPr>
+                      <a:r>
+                        <a:rPr b="1"/>
+                        <a:t>Outcomes in 2030 (vs. no AI)</a:t>
+                      </a:r>
+                    </a:p>
+                  </a:txBody>
+                </a:tc>
+                <a:tc>
+                  <a:txBody>
+                    <a:bodyPr/>
+                    <a:lstStyle/>
+                    <a:p>
+                      <a:endParaRPr/>
+                    </a:p>
+                  </a:txBody>
+                </a:tc>
+                <a:tc>
+                  <a:txBody>
+                    <a:bodyPr/>
+                    <a:lstStyle/>
+                    <a:p>
+                      <a:endParaRPr/>
+                    </a:p>
+                  </a:txBody>
+                </a:tc>
+              </a:tr>
+              <a:tr h="0">
+                <a:tc>
+                  <a:txBody>
+                    <a:bodyPr/>
+                    <a:lstStyle/>
+                    <a:p>
+                      <a:pPr lvl="0" indent="0" marL="0">
+                        <a:buNone/>
+                      </a:pPr>
+                      <a:r>
+                        <a:rPr/>
+                        <a:t>Overall</a:t>
+                      </a:r>
+                    </a:p>
+                  </a:txBody>
+                </a:tc>
+                <a:tc>
+                  <a:txBody>
+                    <a:bodyPr/>
+                    <a:lstStyle/>
+                    <a:p>
+                      <a:pPr lvl="0" indent="0" marL="0">
+                        <a:buNone/>
+                      </a:pPr>
+                      <a:r>
+                        <a:rPr/>
+                        <a:t>GDP, unemployment, labour share</a:t>
+                      </a:r>
+                    </a:p>
+                  </a:txBody>
+                </a:tc>
+                <a:tc>
+                  <a:txBody>
+                    <a:bodyPr/>
+                    <a:lstStyle/>
+                    <a:p>
+                      <a:endParaRPr/>
+                    </a:p>
+                  </a:txBody>
+                </a:tc>
+              </a:tr>
+              <a:tr h="0">
+                <a:tc>
+                  <a:txBody>
+                    <a:bodyPr/>
+                    <a:lstStyle/>
+                    <a:p>
+                      <a:pPr lvl="0" indent="0" marL="0">
+                        <a:buNone/>
+                      </a:pPr>
+                      <a:r>
+                        <a:rPr/>
+                        <a:t>Cognitive workers</a:t>
+                      </a:r>
+                    </a:p>
+                  </a:txBody>
+                </a:tc>
+                <a:tc>
+                  <a:txBody>
+                    <a:bodyPr/>
+                    <a:lstStyle/>
+                    <a:p>
+                      <a:pPr lvl="0" indent="0" marL="0">
+                        <a:buNone/>
+                      </a:pPr>
+                      <a:r>
+                        <a:rPr/>
+                        <a:t>wage, employment</a:t>
+                      </a:r>
+                    </a:p>
+                  </a:txBody>
+                </a:tc>
+                <a:tc>
+                  <a:txBody>
+                    <a:bodyPr/>
+                    <a:lstStyle/>
+                    <a:p>
+                      <a:endParaRPr/>
+                    </a:p>
+                  </a:txBody>
+                </a:tc>
+              </a:tr>
+            </a:tbl>
+          </a:graphicData>
+        </a:graphic>
+      </p:graphicFrame>
     </p:spTree>
   </p:cSld>
 </p:sld>
@@ -3486,14 +3856,14 @@
             </a:pPr>
             <a:r>
               <a:rPr/>
-              <a:t>Cognitive wage</a:t>
+              <a:t>Unemployment</a:t>
             </a:r>
           </a:p>
         </p:txBody>
       </p:sp>
       <p:pic>
         <p:nvPicPr>
-          <p:cNvPr descr="../output/figures/wage_C.png" id="0" name="Picture 1"/>
+          <p:cNvPr descr="../output/figures/unemployment.png" id="0" name="Picture 1"/>
           <p:cNvPicPr>
             <a:picLocks noGrp="1" noChangeAspect="1"/>
           </p:cNvPicPr>
@@ -3568,14 +3938,14 @@
             </a:pPr>
             <a:r>
               <a:rPr/>
-              <a:t>Unemployment</a:t>
+              <a:t>Labour share</a:t>
             </a:r>
           </a:p>
         </p:txBody>
       </p:sp>
       <p:pic>
         <p:nvPicPr>
-          <p:cNvPr descr="../output/figures/unemployment.png" id="0" name="Picture 1"/>
+          <p:cNvPr descr="../output/figures/labor_share.png" id="0" name="Picture 1"/>
           <p:cNvPicPr>
             <a:picLocks noGrp="1" noChangeAspect="1"/>
           </p:cNvPicPr>
@@ -3650,14 +4020,14 @@
             </a:pPr>
             <a:r>
               <a:rPr/>
-              <a:t>Cognitive employment</a:t>
+              <a:t>Cognitive wage</a:t>
             </a:r>
           </a:p>
         </p:txBody>
       </p:sp>
       <p:pic>
         <p:nvPicPr>
-          <p:cNvPr descr="../output/figures/employment_C.png" id="0" name="Picture 1"/>
+          <p:cNvPr descr="../output/figures/wage_C.png" id="0" name="Picture 1"/>
           <p:cNvPicPr>
             <a:picLocks noGrp="1" noChangeAspect="1"/>
           </p:cNvPicPr>
@@ -3732,14 +4102,14 @@
             </a:pPr>
             <a:r>
               <a:rPr/>
-              <a:t>Labour share</a:t>
+              <a:t>Cognitive employment</a:t>
             </a:r>
           </a:p>
         </p:txBody>
       </p:sp>
       <p:pic>
         <p:nvPicPr>
-          <p:cNvPr descr="../output/figures/labor_share.png" id="0" name="Picture 1"/>
+          <p:cNvPr descr="../output/figures/employment_C.png" id="0" name="Picture 1"/>
           <p:cNvPicPr>
             <a:picLocks noGrp="1" noChangeAspect="1"/>
           </p:cNvPicPr>
@@ -3901,107 +4271,587 @@
           </a:p>
         </p:txBody>
       </p:sp>
-      <p:sp>
-        <p:nvSpPr>
-          <p:cNvPr id="3" name="Content Placeholder 2"/>
-          <p:cNvSpPr>
-            <a:spLocks noGrp="1"/>
-          </p:cNvSpPr>
+      <p:graphicFrame>
+        <p:nvGraphicFramePr>
+          <p:cNvPr id="6" name="Content Placeholder 5"/>
+          <p:cNvGraphicFramePr>
+            <a:graphicFrameLocks noGrp="1"/>
+          </p:cNvGraphicFramePr>
           <p:nvPr>
             <p:ph idx="1"/>
           </p:nvPr>
-        </p:nvSpPr>
-        <p:spPr/>
-        <p:txBody>
-          <a:bodyPr/>
-          <a:lstStyle/>
-          <a:p>
-            <a:pPr lvl="0"/>
-            <a:r>
-              <a:rPr/>
-              <a:t>Same scenarios in European labour market: </a:t>
-            </a:r>
-            <a:r>
-              <a:rPr b="1"/>
-              <a:t>similar gains, more unemployment</a:t>
-            </a:r>
-          </a:p>
-          <a:p>
-            <a:pPr lvl="1"/>
-            <a:r>
-              <a:rPr/>
-              <a:t>stickier wages + slower hiring turn wage cuts into job losses</a:t>
-            </a:r>
-          </a:p>
-          <a:p>
-            <a:pPr lvl="0"/>
-            <a:r>
-              <a:rPr/>
-              <a:t>Different European scenarios: </a:t>
-            </a:r>
-            <a:r>
-              <a:rPr b="1"/>
-              <a:t>smaller gains, smaller disruption</a:t>
-            </a:r>
-          </a:p>
-          <a:p>
-            <a:pPr lvl="1"/>
-            <a:r>
-              <a:rPr/>
-              <a:t>more new tasks and less automation protect cognitive workers</a:t>
-            </a:r>
-          </a:p>
-          <a:p>
-            <a:pPr lvl="1"/>
-            <a:r>
-              <a:rPr/>
-              <a:t>most of the gap is adoption: Europe starts lower and does not catch up</a:t>
-            </a:r>
-          </a:p>
-          <a:p>
-            <a:pPr lvl="0"/>
-            <a:r>
-              <a:rPr/>
-              <a:t>Adoption as an important lever</a:t>
-            </a:r>
-          </a:p>
-          <a:p>
-            <a:pPr lvl="1"/>
-            <a:r>
-              <a:rPr/>
-              <a:t>catching up with US adoption by 2030: gains up by two thirds, cognitive wages still rise</a:t>
-            </a:r>
-          </a:p>
-          <a:p>
-            <a:pPr lvl="1"/>
-            <a:r>
-              <a:rPr/>
-              <a:t>but in the extreme scenario unemployment then approaches the US level</a:t>
-            </a:r>
-          </a:p>
-          <a:p>
-            <a:pPr lvl="1"/>
-            <a:r>
-              <a:rPr/>
-              <a:t>ongoing work on why adoption differs so much across countries</a:t>
-            </a:r>
-          </a:p>
-          <a:p>
-            <a:pPr lvl="0"/>
-            <a:r>
-              <a:rPr/>
-              <a:t>These parameters are uncertain and open for debate</a:t>
-            </a:r>
-          </a:p>
-          <a:p>
-            <a:pPr lvl="1"/>
-            <a:r>
-              <a:rPr/>
-              <a:t>automation share, new tasks and the adoption path are judgement calls</a:t>
-            </a:r>
-          </a:p>
-        </p:txBody>
-      </p:sp>
+        </p:nvGraphicFramePr>
+        <p:xfrm>
+          <a:off x="457200" y="1193800"/>
+          <a:ext cx="8229600" cy="3175000"/>
+        </p:xfrm>
+        <a:graphic>
+          <a:graphicData uri="http://schemas.openxmlformats.org/drawingml/2006/table">
+            <a:tbl>
+              <a:tblPr firstRow="0" bandRow="1">
+                <a:tableStyleId>{5C22544A-7EE6-4342-B048-85BDC9FD1C3A}</a:tableStyleId>
+              </a:tblPr>
+              <a:tblGrid>
+                <a:gridCol w="2552700"/>
+                <a:gridCol w="990600"/>
+                <a:gridCol w="1155700"/>
+                <a:gridCol w="1155700"/>
+                <a:gridCol w="2387600"/>
+              </a:tblGrid>
+              <a:tr h="0">
+                <a:tc>
+                  <a:txBody>
+                    <a:bodyPr/>
+                    <a:lstStyle/>
+                    <a:p>
+                      <a:pPr lvl="0" indent="0" marL="0">
+                        <a:buNone/>
+                      </a:pPr>
+                      <a:r>
+                        <a:rPr b="1"/>
+                        <a:t>Each set vs the one above</a:t>
+                      </a:r>
+                    </a:p>
+                  </a:txBody>
+                </a:tc>
+                <a:tc>
+                  <a:txBody>
+                    <a:bodyPr/>
+                    <a:lstStyle/>
+                    <a:p>
+                      <a:pPr lvl="0" indent="0" marL="0">
+                        <a:buNone/>
+                      </a:pPr>
+                      <a:r>
+                        <a:rPr b="1"/>
+                        <a:t>GDP</a:t>
+                      </a:r>
+                    </a:p>
+                  </a:txBody>
+                </a:tc>
+                <a:tc>
+                  <a:txBody>
+                    <a:bodyPr/>
+                    <a:lstStyle/>
+                    <a:p>
+                      <a:pPr lvl="0" indent="0" marL="0">
+                        <a:buNone/>
+                      </a:pPr>
+                      <a:r>
+                        <a:rPr b="1"/>
+                        <a:t>Unemployment</a:t>
+                      </a:r>
+                    </a:p>
+                  </a:txBody>
+                </a:tc>
+                <a:tc>
+                  <a:txBody>
+                    <a:bodyPr/>
+                    <a:lstStyle/>
+                    <a:p>
+                      <a:pPr lvl="0" indent="0" marL="0">
+                        <a:buNone/>
+                      </a:pPr>
+                      <a:r>
+                        <a:rPr b="1"/>
+                        <a:t>Cognitive wages</a:t>
+                      </a:r>
+                    </a:p>
+                  </a:txBody>
+                </a:tc>
+                <a:tc>
+                  <a:txBody>
+                    <a:bodyPr/>
+                    <a:lstStyle/>
+                    <a:p>
+                      <a:pPr lvl="0" indent="0" marL="0">
+                        <a:buNone/>
+                      </a:pPr>
+                      <a:r>
+                        <a:rPr b="1"/>
+                        <a:t>Why</a:t>
+                      </a:r>
+                    </a:p>
+                  </a:txBody>
+                </a:tc>
+              </a:tr>
+              <a:tr h="0">
+                <a:tc>
+                  <a:txBody>
+                    <a:bodyPr/>
+                    <a:lstStyle/>
+                    <a:p>
+                      <a:pPr lvl="0" indent="0" marL="0">
+                        <a:buNone/>
+                      </a:pPr>
+                      <a:r>
+                        <a:rPr/>
+                        <a:t>US Economy</a:t>
+                      </a:r>
+                    </a:p>
+                  </a:txBody>
+                </a:tc>
+                <a:tc>
+                  <a:txBody>
+                    <a:bodyPr/>
+                    <a:lstStyle/>
+                    <a:p>
+                      <a:endParaRPr/>
+                    </a:p>
+                  </a:txBody>
+                </a:tc>
+                <a:tc>
+                  <a:txBody>
+                    <a:bodyPr/>
+                    <a:lstStyle/>
+                    <a:p>
+                      <a:endParaRPr/>
+                    </a:p>
+                  </a:txBody>
+                </a:tc>
+                <a:tc>
+                  <a:txBody>
+                    <a:bodyPr/>
+                    <a:lstStyle/>
+                    <a:p>
+                      <a:endParaRPr/>
+                    </a:p>
+                  </a:txBody>
+                </a:tc>
+                <a:tc>
+                  <a:txBody>
+                    <a:bodyPr/>
+                    <a:lstStyle/>
+                    <a:p>
+                      <a:endParaRPr/>
+                    </a:p>
+                  </a:txBody>
+                </a:tc>
+              </a:tr>
+              <a:tr h="0">
+                <a:tc>
+                  <a:txBody>
+                    <a:bodyPr/>
+                    <a:lstStyle/>
+                    <a:p>
+                      <a:pPr lvl="0" indent="0" marL="0">
+                        <a:buNone/>
+                      </a:pPr>
+                      <a:r>
+                        <a:rPr/>
+                        <a:t>EU Economy w. US Scenarios</a:t>
+                      </a:r>
+                    </a:p>
+                  </a:txBody>
+                </a:tc>
+                <a:tc>
+                  <a:txBody>
+                    <a:bodyPr/>
+                    <a:lstStyle/>
+                    <a:p>
+                      <a:pPr lvl="0" indent="0" marL="0">
+                        <a:buNone/>
+                      </a:pPr>
+                      <a:r>
+                        <a:rPr/>
+                        <a:t>similar</a:t>
+                      </a:r>
+                    </a:p>
+                  </a:txBody>
+                </a:tc>
+                <a:tc>
+                  <a:txBody>
+                    <a:bodyPr/>
+                    <a:lstStyle/>
+                    <a:p>
+                      <a:pPr lvl="0" indent="0" marL="0">
+                        <a:buNone/>
+                      </a:pPr>
+                      <a:r>
+                        <a:rPr/>
+                        <a:t>higher</a:t>
+                      </a:r>
+                    </a:p>
+                  </a:txBody>
+                </a:tc>
+                <a:tc>
+                  <a:txBody>
+                    <a:bodyPr/>
+                    <a:lstStyle/>
+                    <a:p>
+                      <a:pPr lvl="0" indent="0" marL="0">
+                        <a:buNone/>
+                      </a:pPr>
+                      <a:r>
+                        <a:rPr/>
+                        <a:t>fall less</a:t>
+                      </a:r>
+                    </a:p>
+                  </a:txBody>
+                </a:tc>
+                <a:tc>
+                  <a:txBody>
+                    <a:bodyPr/>
+                    <a:lstStyle/>
+                    <a:p>
+                      <a:pPr lvl="0" indent="0" marL="0">
+                        <a:buNone/>
+                      </a:pPr>
+                      <a:r>
+                        <a:rPr/>
+                        <a:t>stickier wages, slower hiring</a:t>
+                      </a:r>
+                    </a:p>
+                  </a:txBody>
+                </a:tc>
+              </a:tr>
+              <a:tr h="0">
+                <a:tc>
+                  <a:txBody>
+                    <a:bodyPr/>
+                    <a:lstStyle/>
+                    <a:p>
+                      <a:pPr lvl="0" indent="0" marL="0">
+                        <a:buNone/>
+                      </a:pPr>
+                      <a:r>
+                        <a:rPr lang="en-US" dirty="0">
+                          <a:solidFill>
+                            <a:srgbClr val="003399"/>
+                          </a:solidFill>
+                        </a:rPr>
+                        <a:t>EU</a:t>
+                      </a:r>
+                      <a:r>
+                        <a:rPr lang="en-US" dirty="0">
+                          <a:solidFill>
+                            <a:srgbClr val="003399"/>
+                          </a:solidFill>
+                        </a:rPr>
+                        <a:t> </a:t>
+                      </a:r>
+                      <a:r>
+                        <a:rPr lang="en-US" dirty="0">
+                          <a:solidFill>
+                            <a:srgbClr val="003399"/>
+                          </a:solidFill>
+                        </a:rPr>
+                        <a:t>Economy</a:t>
+                      </a:r>
+                      <a:r>
+                        <a:rPr lang="en-US" dirty="0">
+                          <a:solidFill>
+                            <a:srgbClr val="003399"/>
+                          </a:solidFill>
+                        </a:rPr>
+                        <a:t> </a:t>
+                      </a:r>
+                      <a:r>
+                        <a:rPr lang="en-US" dirty="0">
+                          <a:solidFill>
+                            <a:srgbClr val="003399"/>
+                          </a:solidFill>
+                        </a:rPr>
+                        <a:t>w.</a:t>
+                      </a:r>
+                      <a:r>
+                        <a:rPr lang="en-US" dirty="0">
+                          <a:solidFill>
+                            <a:srgbClr val="003399"/>
+                          </a:solidFill>
+                        </a:rPr>
+                        <a:t> </a:t>
+                      </a:r>
+                      <a:r>
+                        <a:rPr lang="en-US" dirty="0">
+                          <a:solidFill>
+                            <a:srgbClr val="003399"/>
+                          </a:solidFill>
+                        </a:rPr>
+                        <a:t>EMPL</a:t>
+                      </a:r>
+                      <a:r>
+                        <a:rPr lang="en-US" dirty="0">
+                          <a:solidFill>
+                            <a:srgbClr val="003399"/>
+                          </a:solidFill>
+                        </a:rPr>
+                        <a:t> </a:t>
+                      </a:r>
+                      <a:r>
+                        <a:rPr lang="en-US" dirty="0">
+                          <a:solidFill>
+                            <a:srgbClr val="003399"/>
+                          </a:solidFill>
+                        </a:rPr>
+                        <a:t>Scenarios</a:t>
+                      </a:r>
+                    </a:p>
+                  </a:txBody>
+                </a:tc>
+                <a:tc>
+                  <a:txBody>
+                    <a:bodyPr/>
+                    <a:lstStyle/>
+                    <a:p>
+                      <a:pPr lvl="0" indent="0" marL="0">
+                        <a:buNone/>
+                      </a:pPr>
+                      <a:r>
+                        <a:rPr/>
+                        <a:t>lower</a:t>
+                      </a:r>
+                    </a:p>
+                  </a:txBody>
+                </a:tc>
+                <a:tc>
+                  <a:txBody>
+                    <a:bodyPr/>
+                    <a:lstStyle/>
+                    <a:p>
+                      <a:pPr lvl="0" indent="0" marL="0">
+                        <a:buNone/>
+                      </a:pPr>
+                      <a:r>
+                        <a:rPr/>
+                        <a:t>lower</a:t>
+                      </a:r>
+                    </a:p>
+                  </a:txBody>
+                </a:tc>
+                <a:tc>
+                  <a:txBody>
+                    <a:bodyPr/>
+                    <a:lstStyle/>
+                    <a:p>
+                      <a:pPr lvl="0" indent="0" marL="0">
+                        <a:buNone/>
+                      </a:pPr>
+                      <a:r>
+                        <a:rPr/>
+                        <a:t>rise</a:t>
+                      </a:r>
+                    </a:p>
+                  </a:txBody>
+                </a:tc>
+                <a:tc>
+                  <a:txBody>
+                    <a:bodyPr/>
+                    <a:lstStyle/>
+                    <a:p>
+                      <a:pPr lvl="0" indent="0" marL="0">
+                        <a:buNone/>
+                      </a:pPr>
+                      <a:r>
+                        <a:rPr/>
+                        <a:t>lower adoption, less automation</a:t>
+                      </a:r>
+                    </a:p>
+                  </a:txBody>
+                </a:tc>
+              </a:tr>
+              <a:tr h="0">
+                <a:tc>
+                  <a:txBody>
+                    <a:bodyPr/>
+                    <a:lstStyle/>
+                    <a:p>
+                      <a:pPr lvl="0" indent="0" marL="0">
+                        <a:buNone/>
+                      </a:pPr>
+                      <a:r>
+                        <a:rPr lang="en-US" dirty="0">
+                          <a:solidFill>
+                            <a:srgbClr val="003399"/>
+                          </a:solidFill>
+                        </a:rPr>
+                        <a:t>EU</a:t>
+                      </a:r>
+                      <a:r>
+                        <a:rPr lang="en-US" dirty="0">
+                          <a:solidFill>
+                            <a:srgbClr val="003399"/>
+                          </a:solidFill>
+                        </a:rPr>
+                        <a:t> </a:t>
+                      </a:r>
+                      <a:r>
+                        <a:rPr lang="en-US" dirty="0">
+                          <a:solidFill>
+                            <a:srgbClr val="003399"/>
+                          </a:solidFill>
+                        </a:rPr>
+                        <a:t>Economy</a:t>
+                      </a:r>
+                      <a:r>
+                        <a:rPr lang="en-US" dirty="0">
+                          <a:solidFill>
+                            <a:srgbClr val="003399"/>
+                          </a:solidFill>
+                        </a:rPr>
+                        <a:t> </a:t>
+                      </a:r>
+                      <a:r>
+                        <a:rPr lang="en-US" dirty="0">
+                          <a:solidFill>
+                            <a:srgbClr val="003399"/>
+                          </a:solidFill>
+                        </a:rPr>
+                        <a:t>w.</a:t>
+                      </a:r>
+                      <a:r>
+                        <a:rPr lang="en-US" dirty="0">
+                          <a:solidFill>
+                            <a:srgbClr val="003399"/>
+                          </a:solidFill>
+                        </a:rPr>
+                        <a:t> </a:t>
+                      </a:r>
+                      <a:r>
+                        <a:rPr lang="en-US" dirty="0">
+                          <a:solidFill>
+                            <a:srgbClr val="003399"/>
+                          </a:solidFill>
+                        </a:rPr>
+                        <a:t>US</a:t>
+                      </a:r>
+                      <a:r>
+                        <a:rPr lang="en-US" dirty="0">
+                          <a:solidFill>
+                            <a:srgbClr val="003399"/>
+                          </a:solidFill>
+                        </a:rPr>
+                        <a:t> </a:t>
+                      </a:r>
+                      <a:r>
+                        <a:rPr lang="en-US" dirty="0">
+                          <a:solidFill>
+                            <a:srgbClr val="003399"/>
+                          </a:solidFill>
+                        </a:rPr>
+                        <a:t>Adoption</a:t>
+                      </a:r>
+                    </a:p>
+                  </a:txBody>
+                </a:tc>
+                <a:tc>
+                  <a:txBody>
+                    <a:bodyPr/>
+                    <a:lstStyle/>
+                    <a:p>
+                      <a:pPr lvl="0" indent="0" marL="0">
+                        <a:buNone/>
+                      </a:pPr>
+                      <a:r>
+                        <a:rPr/>
+                        <a:t>higher, &lt; US</a:t>
+                      </a:r>
+                    </a:p>
+                  </a:txBody>
+                </a:tc>
+                <a:tc>
+                  <a:txBody>
+                    <a:bodyPr/>
+                    <a:lstStyle/>
+                    <a:p>
+                      <a:pPr lvl="0" indent="0" marL="0">
+                        <a:buNone/>
+                      </a:pPr>
+                      <a:r>
+                        <a:rPr/>
+                        <a:t>higher, ≈ US</a:t>
+                      </a:r>
+                    </a:p>
+                  </a:txBody>
+                </a:tc>
+                <a:tc>
+                  <a:txBody>
+                    <a:bodyPr/>
+                    <a:lstStyle/>
+                    <a:p>
+                      <a:pPr lvl="0" indent="0" marL="0">
+                        <a:buNone/>
+                      </a:pPr>
+                      <a:r>
+                        <a:rPr/>
+                        <a:t>rise more</a:t>
+                      </a:r>
+                    </a:p>
+                  </a:txBody>
+                </a:tc>
+                <a:tc>
+                  <a:txBody>
+                    <a:bodyPr/>
+                    <a:lstStyle/>
+                    <a:p>
+                      <a:pPr lvl="0" indent="0" marL="0">
+                        <a:buNone/>
+                      </a:pPr>
+                      <a:r>
+                        <a:rPr/>
+                        <a:t>faster adoption</a:t>
+                      </a:r>
+                    </a:p>
+                  </a:txBody>
+                </a:tc>
+              </a:tr>
+              <a:tr h="0">
+                <a:tc>
+                  <a:txBody>
+                    <a:bodyPr/>
+                    <a:lstStyle/>
+                    <a:p>
+                      <a:pPr lvl="0" indent="0" marL="0">
+                        <a:buNone/>
+                      </a:pPr>
+                      <a:r>
+                        <a:rPr/>
+                        <a:t>ongoing work: why adoption differs</a:t>
+                      </a:r>
+                    </a:p>
+                  </a:txBody>
+                </a:tc>
+                <a:tc>
+                  <a:txBody>
+                    <a:bodyPr/>
+                    <a:lstStyle/>
+                    <a:p>
+                      <a:endParaRPr/>
+                    </a:p>
+                  </a:txBody>
+                </a:tc>
+                <a:tc>
+                  <a:txBody>
+                    <a:bodyPr/>
+                    <a:lstStyle/>
+                    <a:p>
+                      <a:endParaRPr/>
+                    </a:p>
+                  </a:txBody>
+                </a:tc>
+                <a:tc>
+                  <a:txBody>
+                    <a:bodyPr/>
+                    <a:lstStyle/>
+                    <a:p>
+                      <a:endParaRPr/>
+                    </a:p>
+                  </a:txBody>
+                </a:tc>
+                <a:tc>
+                  <a:txBody>
+                    <a:bodyPr/>
+                    <a:lstStyle/>
+                    <a:p>
+                      <a:endParaRPr/>
+                    </a:p>
+                  </a:txBody>
+                </a:tc>
+              </a:tr>
+            </a:tbl>
+          </a:graphicData>
+        </a:graphic>
+      </p:graphicFrame>
     </p:spTree>
   </p:cSld>
 </p:sld>
@@ -4396,37 +5246,37 @@
                       </a:pPr>
                       <a:r>
                         <a:rPr/>
-                        <a:t>Labour market</a:t>
-                      </a:r>
-                    </a:p>
-                  </a:txBody>
-                </a:tc>
-                <a:tc>
-                  <a:txBody>
-                    <a:bodyPr/>
-                    <a:lstStyle/>
-                    <a:p>
-                      <a:pPr lvl="0" indent="0" marL="0">
-                        <a:buNone/>
-                      </a:pPr>
-                      <a:r>
-                        <a:rPr/>
-                        <a:t>job search, switching, sticky wages</a:t>
-                      </a:r>
-                    </a:p>
-                  </a:txBody>
-                </a:tc>
-                <a:tc>
-                  <a:txBody>
-                    <a:bodyPr/>
-                    <a:lstStyle/>
-                    <a:p>
-                      <a:pPr lvl="0" indent="0" marL="0">
-                        <a:buNone/>
-                      </a:pPr>
-                      <a:r>
-                        <a:rPr/>
-                        <a:t>none: effects imposed directly</a:t>
+                        <a:t>Mechanisms</a:t>
+                      </a:r>
+                    </a:p>
+                  </a:txBody>
+                </a:tc>
+                <a:tc>
+                  <a:txBody>
+                    <a:bodyPr/>
+                    <a:lstStyle/>
+                    <a:p>
+                      <a:pPr lvl="0" indent="0" marL="0">
+                        <a:buNone/>
+                      </a:pPr>
+                      <a:r>
+                        <a:rPr/>
+                        <a:t>sticky wages, job search, switching / re-education</a:t>
+                      </a:r>
+                    </a:p>
+                  </a:txBody>
+                </a:tc>
+                <a:tc>
+                  <a:txBody>
+                    <a:bodyPr/>
+                    <a:lstStyle/>
+                    <a:p>
+                      <a:pPr lvl="0" indent="0" marL="0">
+                        <a:buNone/>
+                      </a:pPr>
+                      <a:r>
+                        <a:rPr/>
+                        <a:t>none: effects imposed, not explained</a:t>
                       </a:r>
                     </a:p>
                   </a:txBody>
@@ -4508,7 +5358,7 @@
                       </a:pPr>
                       <a:r>
                         <a:rPr/>
-                        <a:t>* growth in AI use that takes the most exposed occupations to full adoption</a:t>
+                        <a:t>* growth to full AI use in most exposed jobs</a:t>
                       </a:r>
                     </a:p>
                   </a:txBody>
@@ -5510,6 +6360,936 @@
           </a:p>
         </p:txBody>
       </p:sp>
+    </p:spTree>
+  </p:cSld>
+</p:sld>
+</file>
+
+<file path=ppt/slides/slide20.xml><?xml version="1.0" encoding="utf-8"?>
+<p:sld xmlns:a="http://schemas.openxmlformats.org/drawingml/2006/main" xmlns:r="http://schemas.openxmlformats.org/officeDocument/2006/relationships" xmlns:p="http://schemas.openxmlformats.org/presentationml/2006/main">
+  <p:cSld>
+    <p:spTree>
+      <p:nvGrpSpPr>
+        <p:cNvPr id="1" name=""/>
+        <p:cNvGrpSpPr/>
+        <p:nvPr/>
+      </p:nvGrpSpPr>
+      <p:grpSpPr>
+        <a:xfrm>
+          <a:off x="0" y="0"/>
+          <a:ext cx="0" cy="0"/>
+          <a:chOff x="0" y="0"/>
+          <a:chExt cx="0" cy="0"/>
+        </a:xfrm>
+      </p:grpSpPr>
+      <p:sp>
+        <p:nvSpPr>
+          <p:cNvPr id="2" name="Title 1"/>
+          <p:cNvSpPr>
+            <a:spLocks noGrp="1"/>
+          </p:cNvSpPr>
+          <p:nvPr>
+            <p:ph type="title"/>
+          </p:nvPr>
+        </p:nvSpPr>
+        <p:spPr>
+          <a:xfrm>
+            <a:off x="762000" y="3057525"/>
+            <a:ext cx="7620000" cy="1831975"/>
+          </a:xfrm>
+        </p:spPr>
+        <p:txBody>
+          <a:bodyPr/>
+          <a:lstStyle/>
+          <a:p>
+            <a:pPr lvl="0" indent="0" marL="0">
+              <a:buNone/>
+            </a:pPr>
+            <a:r>
+              <a:rPr/>
+              <a:t>Appendix</a:t>
+            </a:r>
+          </a:p>
+        </p:txBody>
+      </p:sp>
+    </p:spTree>
+  </p:cSld>
+</p:sld>
+</file>
+
+<file path=ppt/slides/slide21.xml><?xml version="1.0" encoding="utf-8"?>
+<p:sld xmlns:a="http://schemas.openxmlformats.org/drawingml/2006/main" xmlns:r="http://schemas.openxmlformats.org/officeDocument/2006/relationships" xmlns:p="http://schemas.openxmlformats.org/presentationml/2006/main">
+  <p:cSld>
+    <p:spTree>
+      <p:nvGrpSpPr>
+        <p:cNvPr id="1" name=""/>
+        <p:cNvGrpSpPr/>
+        <p:nvPr/>
+      </p:nvGrpSpPr>
+      <p:grpSpPr>
+        <a:xfrm>
+          <a:off x="0" y="0"/>
+          <a:ext cx="0" cy="0"/>
+          <a:chOff x="0" y="0"/>
+          <a:chExt cx="0" cy="0"/>
+        </a:xfrm>
+      </p:grpSpPr>
+      <p:sp>
+        <p:nvSpPr>
+          <p:cNvPr id="2" name="Title 1"/>
+          <p:cNvSpPr>
+            <a:spLocks noGrp="1"/>
+          </p:cNvSpPr>
+          <p:nvPr>
+            <p:ph type="title"/>
+          </p:nvPr>
+        </p:nvSpPr>
+        <p:spPr>
+          <a:xfrm>
+            <a:off x="457200" y="205979"/>
+            <a:ext cx="8229600" cy="857250"/>
+          </a:xfrm>
+        </p:spPr>
+        <p:txBody>
+          <a:bodyPr/>
+          <a:lstStyle/>
+          <a:p>
+            <a:pPr lvl="0" indent="0" marL="0">
+              <a:buNone/>
+            </a:pPr>
+            <a:r>
+              <a:rPr/>
+              <a:t>Why adoption starts lower in Europe</a:t>
+            </a:r>
+          </a:p>
+        </p:txBody>
+      </p:sp>
+      <p:graphicFrame>
+        <p:nvGraphicFramePr>
+          <p:cNvPr id="6" name="Content Placeholder 5"/>
+          <p:cNvGraphicFramePr>
+            <a:graphicFrameLocks noGrp="1"/>
+          </p:cNvGraphicFramePr>
+          <p:nvPr>
+            <p:ph idx="1"/>
+          </p:nvPr>
+        </p:nvGraphicFramePr>
+        <p:xfrm>
+          <a:off x="457200" y="1193800"/>
+          <a:ext cx="8229600" cy="3175000"/>
+        </p:xfrm>
+        <a:graphic>
+          <a:graphicData uri="http://schemas.openxmlformats.org/drawingml/2006/table">
+            <a:tbl>
+              <a:tblPr firstRow="1" bandRow="1">
+                <a:tableStyleId>{5C22544A-7EE6-4342-B048-85BDC9FD1C3A}</a:tableStyleId>
+              </a:tblPr>
+              <a:tblGrid>
+                <a:gridCol w="5270500"/>
+                <a:gridCol w="990600"/>
+                <a:gridCol w="990600"/>
+                <a:gridCol w="990600"/>
+              </a:tblGrid>
+              <a:tr h="0">
+                <a:tc>
+                  <a:txBody>
+                    <a:bodyPr/>
+                    <a:lstStyle/>
+                    <a:p>
+                      <a:endParaRPr/>
+                    </a:p>
+                  </a:txBody>
+                  <a:tcPr/>
+                </a:tc>
+                <a:tc>
+                  <a:txBody>
+                    <a:bodyPr/>
+                    <a:lstStyle/>
+                    <a:p>
+                      <a:pPr lvl="0" indent="0" marL="0">
+                        <a:buNone/>
+                      </a:pPr>
+                      <a:r>
+                        <a:rPr/>
+                        <a:t>US</a:t>
+                      </a:r>
+                    </a:p>
+                  </a:txBody>
+                  <a:tcPr/>
+                </a:tc>
+                <a:tc>
+                  <a:txBody>
+                    <a:bodyPr/>
+                    <a:lstStyle/>
+                    <a:p>
+                      <a:pPr lvl="0" indent="0" marL="0">
+                        <a:buNone/>
+                      </a:pPr>
+                      <a:r>
+                        <a:rPr/>
+                        <a:t>EU</a:t>
+                      </a:r>
+                    </a:p>
+                  </a:txBody>
+                  <a:tcPr/>
+                </a:tc>
+                <a:tc>
+                  <a:txBody>
+                    <a:bodyPr/>
+                    <a:lstStyle/>
+                    <a:p>
+                      <a:pPr lvl="0" indent="0" marL="0">
+                        <a:buNone/>
+                      </a:pPr>
+                      <a:r>
+                        <a:rPr/>
+                        <a:t>EU / US</a:t>
+                      </a:r>
+                    </a:p>
+                  </a:txBody>
+                  <a:tcPr/>
+                </a:tc>
+              </a:tr>
+              <a:tr h="0">
+                <a:tc>
+                  <a:txBody>
+                    <a:bodyPr/>
+                    <a:lstStyle/>
+                    <a:p>
+                      <a:pPr lvl="0" indent="0" marL="0">
+                        <a:buNone/>
+                      </a:pPr>
+                      <a:r>
+                        <a:rPr b="1"/>
+                        <a:t>People, any purpose, 2025</a:t>
+                      </a:r>
+                    </a:p>
+                  </a:txBody>
+                </a:tc>
+                <a:tc>
+                  <a:txBody>
+                    <a:bodyPr/>
+                    <a:lstStyle/>
+                    <a:p>
+                      <a:endParaRPr/>
+                    </a:p>
+                  </a:txBody>
+                </a:tc>
+                <a:tc>
+                  <a:txBody>
+                    <a:bodyPr/>
+                    <a:lstStyle/>
+                    <a:p>
+                      <a:endParaRPr/>
+                    </a:p>
+                  </a:txBody>
+                </a:tc>
+                <a:tc>
+                  <a:txBody>
+                    <a:bodyPr/>
+                    <a:lstStyle/>
+                    <a:p>
+                      <a:endParaRPr/>
+                    </a:p>
+                  </a:txBody>
+                </a:tc>
+              </a:tr>
+              <a:tr h="0">
+                <a:tc>
+                  <a:txBody>
+                    <a:bodyPr/>
+                    <a:lstStyle/>
+                    <a:p>
+                      <a:pPr lvl="0" indent="0" marL="0">
+                        <a:buNone/>
+                      </a:pPr>
+                      <a:r>
+                        <a:rPr/>
+                        <a:t>monthly LLM users, millions, total (A)</a:t>
+                      </a:r>
+                    </a:p>
+                  </a:txBody>
+                </a:tc>
+                <a:tc>
+                  <a:txBody>
+                    <a:bodyPr/>
+                    <a:lstStyle/>
+                    <a:p>
+                      <a:pPr lvl="0" indent="0" marL="0">
+                        <a:buNone/>
+                      </a:pPr>
+                      <a:r>
+                        <a:rPr/>
+                        <a:t>61</a:t>
+                      </a:r>
+                    </a:p>
+                  </a:txBody>
+                </a:tc>
+                <a:tc>
+                  <a:txBody>
+                    <a:bodyPr/>
+                    <a:lstStyle/>
+                    <a:p>
+                      <a:pPr lvl="0" indent="0" marL="0">
+                        <a:buNone/>
+                      </a:pPr>
+                      <a:r>
+                        <a:rPr/>
+                        <a:t>133</a:t>
+                      </a:r>
+                    </a:p>
+                  </a:txBody>
+                </a:tc>
+                <a:tc>
+                  <a:txBody>
+                    <a:bodyPr/>
+                    <a:lstStyle/>
+                    <a:p>
+                      <a:pPr lvl="0" indent="0" marL="0">
+                        <a:buNone/>
+                      </a:pPr>
+                      <a:r>
+                        <a:rPr/>
+                        <a:t>2.2</a:t>
+                      </a:r>
+                    </a:p>
+                  </a:txBody>
+                </a:tc>
+              </a:tr>
+              <a:tr h="0">
+                <a:tc>
+                  <a:txBody>
+                    <a:bodyPr/>
+                    <a:lstStyle/>
+                    <a:p>
+                      <a:pPr lvl="0" indent="0" marL="0">
+                        <a:buNone/>
+                      </a:pPr>
+                      <a:r>
+                        <a:rPr b="1"/>
+                        <a:t>Workers, 2026</a:t>
+                      </a:r>
+                    </a:p>
+                  </a:txBody>
+                </a:tc>
+                <a:tc>
+                  <a:txBody>
+                    <a:bodyPr/>
+                    <a:lstStyle/>
+                    <a:p>
+                      <a:endParaRPr/>
+                    </a:p>
+                  </a:txBody>
+                </a:tc>
+                <a:tc>
+                  <a:txBody>
+                    <a:bodyPr/>
+                    <a:lstStyle/>
+                    <a:p>
+                      <a:endParaRPr/>
+                    </a:p>
+                  </a:txBody>
+                </a:tc>
+                <a:tc>
+                  <a:txBody>
+                    <a:bodyPr/>
+                    <a:lstStyle/>
+                    <a:p>
+                      <a:endParaRPr/>
+                    </a:p>
+                  </a:txBody>
+                </a:tc>
+              </a:tr>
+              <a:tr h="0">
+                <a:tc>
+                  <a:txBody>
+                    <a:bodyPr/>
+                    <a:lstStyle/>
+                    <a:p>
+                      <a:pPr lvl="0" indent="0" marL="0">
+                        <a:buNone/>
+                      </a:pPr>
+                      <a:r>
+                        <a:rPr/>
+                        <a:t>use genAI for work (B)</a:t>
+                      </a:r>
+                    </a:p>
+                  </a:txBody>
+                </a:tc>
+                <a:tc>
+                  <a:txBody>
+                    <a:bodyPr/>
+                    <a:lstStyle/>
+                    <a:p>
+                      <a:pPr lvl="0" indent="0" marL="0">
+                        <a:buNone/>
+                      </a:pPr>
+                      <a:r>
+                        <a:rPr/>
+                        <a:t>43%</a:t>
+                      </a:r>
+                    </a:p>
+                  </a:txBody>
+                </a:tc>
+                <a:tc>
+                  <a:txBody>
+                    <a:bodyPr/>
+                    <a:lstStyle/>
+                    <a:p>
+                      <a:pPr lvl="0" indent="0" marL="0">
+                        <a:buNone/>
+                      </a:pPr>
+                      <a:r>
+                        <a:rPr/>
+                        <a:t>30%</a:t>
+                      </a:r>
+                    </a:p>
+                  </a:txBody>
+                </a:tc>
+                <a:tc>
+                  <a:txBody>
+                    <a:bodyPr/>
+                    <a:lstStyle/>
+                    <a:p>
+                      <a:pPr lvl="0" indent="0" marL="0">
+                        <a:buNone/>
+                      </a:pPr>
+                      <a:r>
+                        <a:rPr/>
+                        <a:t>0.69</a:t>
+                      </a:r>
+                    </a:p>
+                  </a:txBody>
+                </a:tc>
+              </a:tr>
+              <a:tr h="0">
+                <a:tc>
+                  <a:txBody>
+                    <a:bodyPr/>
+                    <a:lstStyle/>
+                    <a:p>
+                      <a:pPr lvl="0" indent="0" marL="0">
+                        <a:buNone/>
+                      </a:pPr>
+                      <a:r>
+                        <a:rPr/>
+                        <a:t>share of work hours with genAI (B)</a:t>
+                      </a:r>
+                    </a:p>
+                  </a:txBody>
+                </a:tc>
+                <a:tc>
+                  <a:txBody>
+                    <a:bodyPr/>
+                    <a:lstStyle/>
+                    <a:p>
+                      <a:pPr lvl="0" indent="0" marL="0">
+                        <a:buNone/>
+                      </a:pPr>
+                      <a:r>
+                        <a:rPr/>
+                        <a:t>5.2%</a:t>
+                      </a:r>
+                    </a:p>
+                  </a:txBody>
+                </a:tc>
+                <a:tc>
+                  <a:txBody>
+                    <a:bodyPr/>
+                    <a:lstStyle/>
+                    <a:p>
+                      <a:pPr lvl="0" indent="0" marL="0">
+                        <a:buNone/>
+                      </a:pPr>
+                      <a:r>
+                        <a:rPr/>
+                        <a:t>1.7%</a:t>
+                      </a:r>
+                    </a:p>
+                  </a:txBody>
+                </a:tc>
+                <a:tc>
+                  <a:txBody>
+                    <a:bodyPr/>
+                    <a:lstStyle/>
+                    <a:p>
+                      <a:pPr lvl="0" indent="0" marL="0">
+                        <a:buNone/>
+                      </a:pPr>
+                      <a:r>
+                        <a:rPr/>
+                        <a:t>0.33</a:t>
+                      </a:r>
+                    </a:p>
+                  </a:txBody>
+                </a:tc>
+              </a:tr>
+              <a:tr h="0">
+                <a:tc>
+                  <a:txBody>
+                    <a:bodyPr/>
+                    <a:lstStyle/>
+                    <a:p>
+                      <a:pPr lvl="0" indent="0" marL="0">
+                        <a:buNone/>
+                      </a:pPr>
+                      <a:r>
+                        <a:rPr b="1"/>
+                        <a:t>Firms, 2025</a:t>
+                      </a:r>
+                    </a:p>
+                  </a:txBody>
+                </a:tc>
+                <a:tc>
+                  <a:txBody>
+                    <a:bodyPr/>
+                    <a:lstStyle/>
+                    <a:p>
+                      <a:endParaRPr/>
+                    </a:p>
+                  </a:txBody>
+                </a:tc>
+                <a:tc>
+                  <a:txBody>
+                    <a:bodyPr/>
+                    <a:lstStyle/>
+                    <a:p>
+                      <a:endParaRPr/>
+                    </a:p>
+                  </a:txBody>
+                </a:tc>
+                <a:tc>
+                  <a:txBody>
+                    <a:bodyPr/>
+                    <a:lstStyle/>
+                    <a:p>
+                      <a:endParaRPr/>
+                    </a:p>
+                  </a:txBody>
+                </a:tc>
+              </a:tr>
+              <a:tr h="0">
+                <a:tc>
+                  <a:txBody>
+                    <a:bodyPr/>
+                    <a:lstStyle/>
+                    <a:p>
+                      <a:pPr lvl="0" indent="0" marL="0">
+                        <a:buNone/>
+                      </a:pPr>
+                      <a:r>
+                        <a:rPr/>
+                        <a:t>use AI, any purpose (C)</a:t>
+                      </a:r>
+                    </a:p>
+                  </a:txBody>
+                </a:tc>
+                <a:tc>
+                  <a:txBody>
+                    <a:bodyPr/>
+                    <a:lstStyle/>
+                    <a:p>
+                      <a:pPr lvl="0" indent="0" marL="0">
+                        <a:buNone/>
+                      </a:pPr>
+                      <a:r>
+                        <a:rPr/>
+                        <a:t>34%</a:t>
+                      </a:r>
+                    </a:p>
+                  </a:txBody>
+                </a:tc>
+                <a:tc>
+                  <a:txBody>
+                    <a:bodyPr/>
+                    <a:lstStyle/>
+                    <a:p>
+                      <a:pPr lvl="0" indent="0" marL="0">
+                        <a:buNone/>
+                      </a:pPr>
+                      <a:r>
+                        <a:rPr/>
+                        <a:t>20%</a:t>
+                      </a:r>
+                    </a:p>
+                  </a:txBody>
+                </a:tc>
+                <a:tc>
+                  <a:txBody>
+                    <a:bodyPr/>
+                    <a:lstStyle/>
+                    <a:p>
+                      <a:pPr lvl="0" indent="0" marL="0">
+                        <a:buNone/>
+                      </a:pPr>
+                      <a:r>
+                        <a:rPr/>
+                        <a:t>0.59</a:t>
+                      </a:r>
+                    </a:p>
+                  </a:txBody>
+                </a:tc>
+              </a:tr>
+              <a:tr h="0">
+                <a:tc>
+                  <a:txBody>
+                    <a:bodyPr/>
+                    <a:lstStyle/>
+                    <a:p>
+                      <a:pPr lvl="0" indent="0" marL="0">
+                        <a:buNone/>
+                      </a:pPr>
+                      <a:r>
+                        <a:rPr/>
+                        <a:t>deploy genAI (D)</a:t>
+                      </a:r>
+                    </a:p>
+                  </a:txBody>
+                </a:tc>
+                <a:tc>
+                  <a:txBody>
+                    <a:bodyPr/>
+                    <a:lstStyle/>
+                    <a:p>
+                      <a:pPr lvl="0" indent="0" marL="0">
+                        <a:buNone/>
+                      </a:pPr>
+                      <a:r>
+                        <a:rPr/>
+                        <a:t>36%</a:t>
+                      </a:r>
+                    </a:p>
+                  </a:txBody>
+                </a:tc>
+                <a:tc>
+                  <a:txBody>
+                    <a:bodyPr/>
+                    <a:lstStyle/>
+                    <a:p>
+                      <a:pPr lvl="0" indent="0" marL="0">
+                        <a:buNone/>
+                      </a:pPr>
+                      <a:r>
+                        <a:rPr/>
+                        <a:t>37%</a:t>
+                      </a:r>
+                    </a:p>
+                  </a:txBody>
+                </a:tc>
+                <a:tc>
+                  <a:txBody>
+                    <a:bodyPr/>
+                    <a:lstStyle/>
+                    <a:p>
+                      <a:pPr lvl="0" indent="0" marL="0">
+                        <a:buNone/>
+                      </a:pPr>
+                      <a:r>
+                        <a:rPr/>
+                        <a:t>1.03</a:t>
+                      </a:r>
+                    </a:p>
+                  </a:txBody>
+                </a:tc>
+              </a:tr>
+              <a:tr h="0">
+                <a:tc>
+                  <a:txBody>
+                    <a:bodyPr/>
+                    <a:lstStyle/>
+                    <a:p>
+                      <a:pPr lvl="0" indent="0" marL="0">
+                        <a:buNone/>
+                      </a:pPr>
+                      <a:r>
+                        <a:rPr/>
+                        <a:t>of AI users: in more than two activities (D)</a:t>
+                      </a:r>
+                    </a:p>
+                  </a:txBody>
+                </a:tc>
+                <a:tc>
+                  <a:txBody>
+                    <a:bodyPr/>
+                    <a:lstStyle/>
+                    <a:p>
+                      <a:pPr lvl="0" indent="0" marL="0">
+                        <a:buNone/>
+                      </a:pPr>
+                      <a:r>
+                        <a:rPr/>
+                        <a:t>81%</a:t>
+                      </a:r>
+                    </a:p>
+                  </a:txBody>
+                </a:tc>
+                <a:tc>
+                  <a:txBody>
+                    <a:bodyPr/>
+                    <a:lstStyle/>
+                    <a:p>
+                      <a:pPr lvl="0" indent="0" marL="0">
+                        <a:buNone/>
+                      </a:pPr>
+                      <a:r>
+                        <a:rPr/>
+                        <a:t>55%</a:t>
+                      </a:r>
+                    </a:p>
+                  </a:txBody>
+                </a:tc>
+                <a:tc>
+                  <a:txBody>
+                    <a:bodyPr/>
+                    <a:lstStyle/>
+                    <a:p>
+                      <a:pPr lvl="0" indent="0" marL="0">
+                        <a:buNone/>
+                      </a:pPr>
+                      <a:r>
+                        <a:rPr/>
+                        <a:t>0.68</a:t>
+                      </a:r>
+                    </a:p>
+                  </a:txBody>
+                </a:tc>
+              </a:tr>
+              <a:tr h="0">
+                <a:tc>
+                  <a:txBody>
+                    <a:bodyPr/>
+                    <a:lstStyle/>
+                    <a:p>
+                      <a:pPr lvl="0" indent="0" marL="0">
+                        <a:buNone/>
+                      </a:pPr>
+                      <a:r>
+                        <a:rPr b="1"/>
+                        <a:t>Our model, today</a:t>
+                      </a:r>
+                    </a:p>
+                  </a:txBody>
+                </a:tc>
+                <a:tc>
+                  <a:txBody>
+                    <a:bodyPr/>
+                    <a:lstStyle/>
+                    <a:p>
+                      <a:endParaRPr/>
+                    </a:p>
+                  </a:txBody>
+                </a:tc>
+                <a:tc>
+                  <a:txBody>
+                    <a:bodyPr/>
+                    <a:lstStyle/>
+                    <a:p>
+                      <a:endParaRPr/>
+                    </a:p>
+                  </a:txBody>
+                </a:tc>
+                <a:tc>
+                  <a:txBody>
+                    <a:bodyPr/>
+                    <a:lstStyle/>
+                    <a:p>
+                      <a:endParaRPr/>
+                    </a:p>
+                  </a:txBody>
+                </a:tc>
+              </a:tr>
+              <a:tr h="0">
+                <a:tc>
+                  <a:txBody>
+                    <a:bodyPr/>
+                    <a:lstStyle/>
+                    <a:p>
+                      <a:pPr lvl="0" indent="0" marL="0">
+                        <a:buNone/>
+                      </a:pPr>
+                      <a:r>
+                        <a:rPr/>
+                        <a:t>share of AI-doable work done with AI (E)</a:t>
+                      </a:r>
+                    </a:p>
+                  </a:txBody>
+                </a:tc>
+                <a:tc>
+                  <a:txBody>
+                    <a:bodyPr/>
+                    <a:lstStyle/>
+                    <a:p>
+                      <a:pPr lvl="0" indent="0" marL="0">
+                        <a:buNone/>
+                      </a:pPr>
+                      <a:r>
+                        <a:rPr/>
+                        <a:t>10%</a:t>
+                      </a:r>
+                    </a:p>
+                  </a:txBody>
+                </a:tc>
+                <a:tc>
+                  <a:txBody>
+                    <a:bodyPr/>
+                    <a:lstStyle/>
+                    <a:p>
+                      <a:pPr lvl="0" indent="0" marL="0">
+                        <a:buNone/>
+                      </a:pPr>
+                      <a:r>
+                        <a:rPr/>
+                        <a:t>6%</a:t>
+                      </a:r>
+                    </a:p>
+                  </a:txBody>
+                </a:tc>
+                <a:tc>
+                  <a:txBody>
+                    <a:bodyPr/>
+                    <a:lstStyle/>
+                    <a:p>
+                      <a:pPr lvl="0" indent="0" marL="0">
+                        <a:buNone/>
+                      </a:pPr>
+                      <a:r>
+                        <a:rPr/>
+                        <a:t>0.6</a:t>
+                      </a:r>
+                    </a:p>
+                  </a:txBody>
+                </a:tc>
+              </a:tr>
+              <a:tr h="0">
+                <a:tc>
+                  <a:txBody>
+                    <a:bodyPr/>
+                    <a:lstStyle/>
+                    <a:p>
+                      <a:pPr lvl="0" indent="0" marL="0">
+                        <a:buNone/>
+                      </a:pPr>
+                      <a:r>
+                        <a:rPr/>
+                        <a:t>(A) Prosus/Dealroom, Europe (B) Bick et al. 2026, EU-5 (C) Eurostat; US Census (D) EIB survey (E) AIM-WORK; Korinek et al.</a:t>
+                      </a:r>
+                    </a:p>
+                  </a:txBody>
+                </a:tc>
+                <a:tc>
+                  <a:txBody>
+                    <a:bodyPr/>
+                    <a:lstStyle/>
+                    <a:p>
+                      <a:endParaRPr/>
+                    </a:p>
+                  </a:txBody>
+                </a:tc>
+                <a:tc>
+                  <a:txBody>
+                    <a:bodyPr/>
+                    <a:lstStyle/>
+                    <a:p>
+                      <a:endParaRPr/>
+                    </a:p>
+                  </a:txBody>
+                </a:tc>
+                <a:tc>
+                  <a:txBody>
+                    <a:bodyPr/>
+                    <a:lstStyle/>
+                    <a:p>
+                      <a:endParaRPr/>
+                    </a:p>
+                  </a:txBody>
+                </a:tc>
+              </a:tr>
+            </a:tbl>
+          </a:graphicData>
+        </a:graphic>
+      </p:graphicFrame>
+    </p:spTree>
+  </p:cSld>
+</p:sld>
+</file>
+
+<file path=ppt/slides/slide22.xml><?xml version="1.0" encoding="utf-8"?>
+<p:sld xmlns:a="http://schemas.openxmlformats.org/drawingml/2006/main" xmlns:r="http://schemas.openxmlformats.org/officeDocument/2006/relationships" xmlns:p="http://schemas.openxmlformats.org/presentationml/2006/main">
+  <p:cSld>
+    <p:spTree>
+      <p:nvGrpSpPr>
+        <p:cNvPr id="1" name=""/>
+        <p:cNvGrpSpPr/>
+        <p:nvPr/>
+      </p:nvGrpSpPr>
+      <p:grpSpPr>
+        <a:xfrm>
+          <a:off x="0" y="0"/>
+          <a:ext cx="0" cy="0"/>
+          <a:chOff x="0" y="0"/>
+          <a:chExt cx="0" cy="0"/>
+        </a:xfrm>
+      </p:grpSpPr>
+      <p:sp>
+        <p:nvSpPr>
+          <p:cNvPr id="2" name="Title 1"/>
+          <p:cNvSpPr>
+            <a:spLocks noGrp="1"/>
+          </p:cNvSpPr>
+          <p:nvPr>
+            <p:ph type="title"/>
+          </p:nvPr>
+        </p:nvSpPr>
+        <p:spPr>
+          <a:xfrm>
+            <a:off x="457200" y="205979"/>
+            <a:ext cx="8229600" cy="857250"/>
+          </a:xfrm>
+        </p:spPr>
+        <p:txBody>
+          <a:bodyPr/>
+          <a:lstStyle/>
+          <a:p>
+            <a:pPr lvl="0" indent="0" marL="0">
+              <a:buNone/>
+            </a:pPr>
+            <a:r>
+              <a:rPr/>
+              <a:t>Other workers gain in every scenario</a:t>
+            </a:r>
+          </a:p>
+        </p:txBody>
+      </p:sp>
+      <p:pic>
+        <p:nvPicPr>
+          <p:cNvPr descr="../output/figures/other_workers.png" id="0" name="Picture 1"/>
+          <p:cNvPicPr>
+            <a:picLocks noGrp="1" noChangeAspect="1"/>
+          </p:cNvPicPr>
+          <p:nvPr/>
+        </p:nvPicPr>
+        <p:blipFill>
+          <a:blip r:embed="rId2"/>
+          <a:stretch>
+            <a:fillRect/>
+          </a:stretch>
+        </p:blipFill>
+        <p:spPr bwMode="auto">
+          <a:xfrm>
+            <a:off x="609600" y="1193800"/>
+            <a:ext cx="7937500" cy="3175000"/>
+          </a:xfrm>
+          <a:prstGeom prst="rect">
+            <a:avLst/>
+          </a:prstGeom>
+          <a:noFill/>
+          <a:ln w="9525">
+            <a:noFill/>
+            <a:headEnd/>
+            <a:tailEnd/>
+          </a:ln>
+        </p:spPr>
+      </p:pic>
     </p:spTree>
   </p:cSld>
 </p:sld>
